--- a/content/W01/D1/slides/C2_W01_D01_half2_STUDENT.pptx
+++ b/content/W01/D1/slides/C2_W01_D01_half2_STUDENT.pptx
@@ -3236,7 +3236,7 @@
           <a:noFill/>
         </p:spPr>
         <p:txBody>
-          <a:bodyPr wrap="square" anchor="ctr">
+          <a:bodyPr wrap="square" anchor="ctr" lIns="0" rIns="0" tIns="0" bIns="0">
             <a:spAutoFit/>
           </a:bodyPr>
           <a:lstStyle/>
@@ -3314,7 +3314,7 @@
           <a:noFill/>
         </p:spPr>
         <p:txBody>
-          <a:bodyPr wrap="square" anchor="t">
+          <a:bodyPr wrap="square" anchor="t" lIns="0" rIns="0" tIns="0" bIns="0">
             <a:spAutoFit/>
           </a:bodyPr>
           <a:lstStyle/>
@@ -3413,7 +3413,7 @@
           <a:noFill/>
         </p:spPr>
         <p:txBody>
-          <a:bodyPr wrap="square" anchor="t">
+          <a:bodyPr wrap="square" anchor="t" lIns="0" rIns="0" tIns="0" bIns="0">
             <a:spAutoFit/>
           </a:bodyPr>
           <a:lstStyle/>
@@ -3447,7 +3447,7 @@
           <a:noFill/>
         </p:spPr>
         <p:txBody>
-          <a:bodyPr wrap="square" anchor="t">
+          <a:bodyPr wrap="square" anchor="t" lIns="0" rIns="0" tIns="0" bIns="0">
             <a:spAutoFit/>
           </a:bodyPr>
           <a:lstStyle/>
@@ -3597,7 +3597,7 @@
           <a:noFill/>
         </p:spPr>
         <p:txBody>
-          <a:bodyPr wrap="square" anchor="ctr">
+          <a:bodyPr wrap="square" anchor="ctr" lIns="0" rIns="0" tIns="0" bIns="0">
             <a:spAutoFit/>
           </a:bodyPr>
           <a:lstStyle/>
@@ -3675,7 +3675,7 @@
           <a:noFill/>
         </p:spPr>
         <p:txBody>
-          <a:bodyPr wrap="square" anchor="t">
+          <a:bodyPr wrap="square" anchor="t" lIns="0" rIns="0" tIns="0" bIns="0">
             <a:spAutoFit/>
           </a:bodyPr>
           <a:lstStyle/>
@@ -3790,7 +3790,7 @@
           <a:noFill/>
         </p:spPr>
         <p:txBody>
-          <a:bodyPr wrap="square" anchor="t">
+          <a:bodyPr wrap="square" anchor="t" lIns="0" rIns="0" tIns="0" bIns="0">
             <a:spAutoFit/>
           </a:bodyPr>
           <a:lstStyle/>
@@ -3824,7 +3824,7 @@
           <a:noFill/>
         </p:spPr>
         <p:txBody>
-          <a:bodyPr wrap="square" anchor="t">
+          <a:bodyPr wrap="square" anchor="t" lIns="0" rIns="0" tIns="0" bIns="0">
             <a:spAutoFit/>
           </a:bodyPr>
           <a:lstStyle/>
@@ -3974,7 +3974,7 @@
           <a:noFill/>
         </p:spPr>
         <p:txBody>
-          <a:bodyPr wrap="square" anchor="ctr">
+          <a:bodyPr wrap="square" anchor="ctr" lIns="0" rIns="0" tIns="0" bIns="0">
             <a:spAutoFit/>
           </a:bodyPr>
           <a:lstStyle/>
@@ -4052,7 +4052,7 @@
           <a:noFill/>
         </p:spPr>
         <p:txBody>
-          <a:bodyPr wrap="square" anchor="t">
+          <a:bodyPr wrap="square" anchor="t" lIns="0" rIns="0" tIns="0" bIns="0">
             <a:spAutoFit/>
           </a:bodyPr>
           <a:lstStyle/>
@@ -4086,7 +4086,7 @@
           <a:noFill/>
         </p:spPr>
         <p:txBody>
-          <a:bodyPr wrap="square" anchor="t">
+          <a:bodyPr wrap="square" anchor="t" lIns="0" rIns="0" tIns="0" bIns="0">
             <a:spAutoFit/>
           </a:bodyPr>
           <a:lstStyle/>
@@ -4120,7 +4120,7 @@
           <a:noFill/>
         </p:spPr>
         <p:txBody>
-          <a:bodyPr wrap="square" anchor="t">
+          <a:bodyPr wrap="square" anchor="t" lIns="0" rIns="0" tIns="0" bIns="0">
             <a:spAutoFit/>
           </a:bodyPr>
           <a:lstStyle/>
@@ -4154,7 +4154,7 @@
           <a:noFill/>
         </p:spPr>
         <p:txBody>
-          <a:bodyPr wrap="square" anchor="t">
+          <a:bodyPr wrap="square" anchor="t" lIns="0" rIns="0" tIns="0" bIns="0">
             <a:spAutoFit/>
           </a:bodyPr>
           <a:lstStyle/>
@@ -4188,7 +4188,7 @@
           <a:noFill/>
         </p:spPr>
         <p:txBody>
-          <a:bodyPr wrap="square" anchor="t">
+          <a:bodyPr wrap="square" anchor="t" lIns="0" rIns="0" tIns="0" bIns="0">
             <a:spAutoFit/>
           </a:bodyPr>
           <a:lstStyle/>
@@ -4222,7 +4222,7 @@
           <a:noFill/>
         </p:spPr>
         <p:txBody>
-          <a:bodyPr wrap="square" anchor="t">
+          <a:bodyPr wrap="square" anchor="t" lIns="0" rIns="0" tIns="0" bIns="0">
             <a:spAutoFit/>
           </a:bodyPr>
           <a:lstStyle/>
@@ -4256,7 +4256,7 @@
           <a:noFill/>
         </p:spPr>
         <p:txBody>
-          <a:bodyPr wrap="square" anchor="t">
+          <a:bodyPr wrap="square" anchor="t" lIns="0" rIns="0" tIns="0" bIns="0">
             <a:spAutoFit/>
           </a:bodyPr>
           <a:lstStyle/>
@@ -4290,7 +4290,7 @@
           <a:noFill/>
         </p:spPr>
         <p:txBody>
-          <a:bodyPr wrap="square" anchor="t">
+          <a:bodyPr wrap="square" anchor="t" lIns="0" rIns="0" tIns="0" bIns="0">
             <a:spAutoFit/>
           </a:bodyPr>
           <a:lstStyle/>
@@ -4368,7 +4368,7 @@
           <a:noFill/>
         </p:spPr>
         <p:txBody>
-          <a:bodyPr wrap="square" anchor="t">
+          <a:bodyPr wrap="square" anchor="t" lIns="0" rIns="0" tIns="0" bIns="0">
             <a:spAutoFit/>
           </a:bodyPr>
           <a:lstStyle/>
@@ -4402,7 +4402,7 @@
           <a:noFill/>
         </p:spPr>
         <p:txBody>
-          <a:bodyPr wrap="square" anchor="t">
+          <a:bodyPr wrap="square" anchor="t" lIns="0" rIns="0" tIns="0" bIns="0">
             <a:spAutoFit/>
           </a:bodyPr>
           <a:lstStyle/>
@@ -4499,7 +4499,7 @@
           <a:noFill/>
         </p:spPr>
         <p:txBody>
-          <a:bodyPr wrap="square" anchor="ctr">
+          <a:bodyPr wrap="square" anchor="ctr" lIns="0" rIns="0" tIns="0" bIns="0">
             <a:spAutoFit/>
           </a:bodyPr>
           <a:lstStyle/>
@@ -4843,7 +4843,7 @@
           <a:noFill/>
         </p:spPr>
         <p:txBody>
-          <a:bodyPr wrap="square" anchor="t">
+          <a:bodyPr wrap="square" anchor="t" lIns="0" rIns="0" tIns="0" bIns="0">
             <a:spAutoFit/>
           </a:bodyPr>
           <a:lstStyle/>
@@ -4877,7 +4877,7 @@
           <a:noFill/>
         </p:spPr>
         <p:txBody>
-          <a:bodyPr wrap="square" anchor="t">
+          <a:bodyPr wrap="square" anchor="t" lIns="0" rIns="0" tIns="0" bIns="0">
             <a:spAutoFit/>
           </a:bodyPr>
           <a:lstStyle/>
@@ -5027,7 +5027,7 @@
           <a:noFill/>
         </p:spPr>
         <p:txBody>
-          <a:bodyPr wrap="square" anchor="ctr">
+          <a:bodyPr wrap="square" anchor="ctr" lIns="0" rIns="0" tIns="0" bIns="0">
             <a:spAutoFit/>
           </a:bodyPr>
           <a:lstStyle/>
@@ -5096,8 +5096,8 @@
         </p:nvSpPr>
         <p:spPr>
           <a:xfrm>
-            <a:off x="685800" y="2802128"/>
-            <a:ext cx="10820095" cy="1347216"/>
+            <a:off x="685800" y="2597912"/>
+            <a:ext cx="10820095" cy="1410208"/>
           </a:xfrm>
           <a:prstGeom prst="rect">
             <a:avLst/>
@@ -5140,8 +5140,8 @@
         </p:nvSpPr>
         <p:spPr>
           <a:xfrm>
-            <a:off x="685800" y="2802128"/>
-            <a:ext cx="50292" cy="1347216"/>
+            <a:off x="685800" y="2597912"/>
+            <a:ext cx="50292" cy="1410208"/>
           </a:xfrm>
           <a:prstGeom prst="rect">
             <a:avLst/>
@@ -5184,8 +5184,8 @@
         </p:nvSpPr>
         <p:spPr>
           <a:xfrm>
-            <a:off x="923544" y="2902712"/>
-            <a:ext cx="10417759" cy="1164336"/>
+            <a:off x="923544" y="2698496"/>
+            <a:ext cx="10417759" cy="1227328"/>
           </a:xfrm>
           <a:prstGeom prst="rect">
             <a:avLst/>
@@ -5193,7 +5193,7 @@
           <a:noFill/>
         </p:spPr>
         <p:txBody>
-          <a:bodyPr wrap="square" anchor="t">
+          <a:bodyPr wrap="square" anchor="t" lIns="0" rIns="0" tIns="0" bIns="0">
             <a:spAutoFit/>
           </a:bodyPr>
           <a:lstStyle/>
@@ -5262,8 +5262,8 @@
         </p:nvSpPr>
         <p:spPr>
           <a:xfrm>
-            <a:off x="685800" y="4313936"/>
-            <a:ext cx="10820095" cy="564896"/>
+            <a:off x="685800" y="4172712"/>
+            <a:ext cx="10820095" cy="910336"/>
           </a:xfrm>
           <a:prstGeom prst="rect">
             <a:avLst/>
@@ -5271,7 +5271,7 @@
           <a:noFill/>
         </p:spPr>
         <p:txBody>
-          <a:bodyPr wrap="square" anchor="t">
+          <a:bodyPr wrap="square" anchor="t" lIns="0" rIns="0" tIns="0" bIns="0">
             <a:spAutoFit/>
           </a:bodyPr>
           <a:lstStyle/>
@@ -5354,7 +5354,7 @@
           <a:noFill/>
         </p:spPr>
         <p:txBody>
-          <a:bodyPr wrap="square" anchor="t">
+          <a:bodyPr wrap="square" anchor="t" lIns="0" rIns="0" tIns="0" bIns="0">
             <a:spAutoFit/>
           </a:bodyPr>
           <a:lstStyle/>
@@ -5388,7 +5388,7 @@
           <a:noFill/>
         </p:spPr>
         <p:txBody>
-          <a:bodyPr wrap="square" anchor="t">
+          <a:bodyPr wrap="square" anchor="t" lIns="0" rIns="0" tIns="0" bIns="0">
             <a:spAutoFit/>
           </a:bodyPr>
           <a:lstStyle/>
@@ -5538,7 +5538,7 @@
           <a:noFill/>
         </p:spPr>
         <p:txBody>
-          <a:bodyPr wrap="square" anchor="ctr">
+          <a:bodyPr wrap="square" anchor="ctr" lIns="0" rIns="0" tIns="0" bIns="0">
             <a:spAutoFit/>
           </a:bodyPr>
           <a:lstStyle/>
@@ -5607,8 +5607,8 @@
         </p:nvSpPr>
         <p:spPr>
           <a:xfrm>
-            <a:off x="685800" y="2535936"/>
-            <a:ext cx="10820095" cy="1078992"/>
+            <a:off x="685800" y="2514600"/>
+            <a:ext cx="10820095" cy="1121664"/>
           </a:xfrm>
           <a:prstGeom prst="rect">
             <a:avLst/>
@@ -5651,8 +5651,8 @@
         </p:nvSpPr>
         <p:spPr>
           <a:xfrm>
-            <a:off x="685800" y="2535936"/>
-            <a:ext cx="50292" cy="1078992"/>
+            <a:off x="685800" y="2514600"/>
+            <a:ext cx="50292" cy="1121664"/>
           </a:xfrm>
           <a:prstGeom prst="rect">
             <a:avLst/>
@@ -5695,8 +5695,8 @@
         </p:nvSpPr>
         <p:spPr>
           <a:xfrm>
-            <a:off x="923544" y="2636520"/>
-            <a:ext cx="10417759" cy="896112"/>
+            <a:off x="923544" y="2615184"/>
+            <a:ext cx="10417759" cy="938784"/>
           </a:xfrm>
           <a:prstGeom prst="rect">
             <a:avLst/>
@@ -5704,7 +5704,7 @@
           <a:noFill/>
         </p:spPr>
         <p:txBody>
-          <a:bodyPr wrap="square" anchor="t">
+          <a:bodyPr wrap="square" anchor="t" lIns="0" rIns="0" tIns="0" bIns="0">
             <a:spAutoFit/>
           </a:bodyPr>
           <a:lstStyle/>
@@ -5766,7 +5766,7 @@
         </p:nvSpPr>
         <p:spPr>
           <a:xfrm>
-            <a:off x="685800" y="3779520"/>
+            <a:off x="685800" y="3800856"/>
             <a:ext cx="10820095" cy="1365504"/>
           </a:xfrm>
           <a:prstGeom prst="rect">
@@ -5775,7 +5775,7 @@
           <a:noFill/>
         </p:spPr>
         <p:txBody>
-          <a:bodyPr wrap="square" anchor="t">
+          <a:bodyPr wrap="square" anchor="t" lIns="0" rIns="0" tIns="0" bIns="0">
             <a:spAutoFit/>
           </a:bodyPr>
           <a:lstStyle/>
@@ -5874,7 +5874,7 @@
           <a:noFill/>
         </p:spPr>
         <p:txBody>
-          <a:bodyPr wrap="square" anchor="t">
+          <a:bodyPr wrap="square" anchor="t" lIns="0" rIns="0" tIns="0" bIns="0">
             <a:spAutoFit/>
           </a:bodyPr>
           <a:lstStyle/>
@@ -5908,7 +5908,7 @@
           <a:noFill/>
         </p:spPr>
         <p:txBody>
-          <a:bodyPr wrap="square" anchor="t">
+          <a:bodyPr wrap="square" anchor="t" lIns="0" rIns="0" tIns="0" bIns="0">
             <a:spAutoFit/>
           </a:bodyPr>
           <a:lstStyle/>
@@ -6058,7 +6058,7 @@
           <a:noFill/>
         </p:spPr>
         <p:txBody>
-          <a:bodyPr wrap="square" anchor="ctr">
+          <a:bodyPr wrap="square" anchor="ctr" lIns="0" rIns="0" tIns="0" bIns="0">
             <a:spAutoFit/>
           </a:bodyPr>
           <a:lstStyle/>
@@ -6128,7 +6128,7 @@
         <p:spPr>
           <a:xfrm>
             <a:off x="685800" y="1627632"/>
-            <a:ext cx="10820095" cy="1615440"/>
+            <a:ext cx="10820095" cy="1247902"/>
           </a:xfrm>
           <a:prstGeom prst="rect">
             <a:avLst/>
@@ -6172,7 +6172,7 @@
         <p:spPr>
           <a:xfrm>
             <a:off x="685800" y="1627632"/>
-            <a:ext cx="50292" cy="1615440"/>
+            <a:ext cx="50292" cy="1247902"/>
           </a:xfrm>
           <a:prstGeom prst="rect">
             <a:avLst/>
@@ -6216,7 +6216,7 @@
         <p:spPr>
           <a:xfrm>
             <a:off x="923544" y="1728216"/>
-            <a:ext cx="10417759" cy="1432560"/>
+            <a:ext cx="10417759" cy="1065022"/>
           </a:xfrm>
           <a:prstGeom prst="rect">
             <a:avLst/>
@@ -6224,7 +6224,7 @@
           <a:noFill/>
         </p:spPr>
         <p:txBody>
-          <a:bodyPr wrap="square" anchor="t">
+          <a:bodyPr wrap="square" anchor="t" lIns="0" rIns="0" tIns="0" bIns="0">
             <a:spAutoFit/>
           </a:bodyPr>
           <a:lstStyle/>
@@ -6235,7 +6235,7 @@
               </a:spcAft>
             </a:pPr>
             <a:r>
-              <a:rPr sz="1600" b="0">
+              <a:rPr sz="1100" b="0">
                 <a:solidFill>
                   <a:srgbClr val="E4ECF7"/>
                 </a:solidFill>
@@ -6251,7 +6251,7 @@
               </a:spcAft>
             </a:pPr>
             <a:r>
-              <a:rPr sz="1600" b="0">
+              <a:rPr sz="1100" b="0">
                 <a:solidFill>
                   <a:srgbClr val="E4ECF7"/>
                 </a:solidFill>
@@ -6267,7 +6267,7 @@
               </a:spcAft>
             </a:pPr>
             <a:r>
-              <a:rPr sz="1600" b="0">
+              <a:rPr sz="1100" b="0">
                 <a:solidFill>
                   <a:srgbClr val="E4ECF7"/>
                 </a:solidFill>
@@ -6290,7 +6290,7 @@
               </a:spcAft>
             </a:pPr>
             <a:r>
-              <a:rPr sz="1600" b="0">
+              <a:rPr sz="1100" b="0">
                 <a:solidFill>
                   <a:srgbClr val="E4ECF7"/>
                 </a:solidFill>
@@ -6309,8 +6309,8 @@
         </p:nvSpPr>
         <p:spPr>
           <a:xfrm>
-            <a:off x="685800" y="3407664"/>
-            <a:ext cx="10820095" cy="1365504"/>
+            <a:off x="685800" y="3040126"/>
+            <a:ext cx="10820095" cy="1002792"/>
           </a:xfrm>
           <a:prstGeom prst="rect">
             <a:avLst/>
@@ -6318,18 +6318,18 @@
           <a:noFill/>
         </p:spPr>
         <p:txBody>
-          <a:bodyPr wrap="square" anchor="t">
+          <a:bodyPr wrap="square" anchor="t" lIns="0" rIns="0" tIns="0" bIns="0">
             <a:spAutoFit/>
           </a:bodyPr>
           <a:lstStyle/>
           <a:p>
             <a:pPr>
               <a:spcAft>
-                <a:spcPts val="900"/>
+                <a:spcPts val="600"/>
               </a:spcAft>
             </a:pPr>
             <a:r>
-              <a:rPr sz="2000" b="0">
+              <a:rPr sz="1300" b="0">
                 <a:solidFill>
                   <a:srgbClr val="1C1C1A"/>
                 </a:solidFill>
@@ -6341,11 +6341,11 @@
           <a:p>
             <a:pPr>
               <a:spcAft>
-                <a:spcPts val="900"/>
+                <a:spcPts val="600"/>
               </a:spcAft>
             </a:pPr>
             <a:r>
-              <a:rPr sz="2000" b="0">
+              <a:rPr sz="1300" b="0">
                 <a:solidFill>
                   <a:srgbClr val="1C1C1A"/>
                 </a:solidFill>
@@ -6364,8 +6364,8 @@
         </p:nvSpPr>
         <p:spPr>
           <a:xfrm>
-            <a:off x="685800" y="4901184"/>
-            <a:ext cx="10820095" cy="542543"/>
+            <a:off x="685800" y="4170934"/>
+            <a:ext cx="10820095" cy="454406"/>
           </a:xfrm>
           <a:prstGeom prst="rect">
             <a:avLst/>
@@ -6408,8 +6408,8 @@
         </p:nvSpPr>
         <p:spPr>
           <a:xfrm>
-            <a:off x="685800" y="4901184"/>
-            <a:ext cx="50292" cy="542543"/>
+            <a:off x="685800" y="4170934"/>
+            <a:ext cx="50292" cy="454406"/>
           </a:xfrm>
           <a:prstGeom prst="rect">
             <a:avLst/>
@@ -6452,8 +6452,8 @@
         </p:nvSpPr>
         <p:spPr>
           <a:xfrm>
-            <a:off x="923544" y="5001768"/>
-            <a:ext cx="10417759" cy="359663"/>
+            <a:off x="923544" y="4271518"/>
+            <a:ext cx="10417759" cy="271526"/>
           </a:xfrm>
           <a:prstGeom prst="rect">
             <a:avLst/>
@@ -6461,7 +6461,7 @@
           <a:noFill/>
         </p:spPr>
         <p:txBody>
-          <a:bodyPr wrap="square" anchor="t">
+          <a:bodyPr wrap="square" anchor="t" lIns="0" rIns="0" tIns="0" bIns="0">
             <a:spAutoFit/>
           </a:bodyPr>
           <a:lstStyle/>
@@ -6472,7 +6472,7 @@
               </a:spcAft>
             </a:pPr>
             <a:r>
-              <a:rPr sz="1600" b="0">
+              <a:rPr sz="1100" b="0">
                 <a:solidFill>
                   <a:srgbClr val="E4ECF7"/>
                 </a:solidFill>
@@ -6485,7 +6485,7 @@
       </p:sp>
       <p:pic>
         <p:nvPicPr>
-          <p:cNvPr id="13" name="Picture 12" descr="166820e3bdddd535.png"/>
+          <p:cNvPr id="13" name="Picture 12" descr="392145c4122623fa.png"/>
           <p:cNvPicPr>
             <a:picLocks noChangeAspect="1"/>
           </p:cNvPicPr>
@@ -6499,8 +6499,8 @@
         </p:blipFill>
         <p:spPr>
           <a:xfrm>
-            <a:off x="4760028" y="5608320"/>
-            <a:ext cx="2671638" cy="1097280"/>
+            <a:off x="4648710" y="4864608"/>
+            <a:ext cx="2894274" cy="1188719"/>
           </a:xfrm>
           <a:prstGeom prst="rect">
             <a:avLst/>
@@ -6568,7 +6568,7 @@
           <a:noFill/>
         </p:spPr>
         <p:txBody>
-          <a:bodyPr wrap="square" anchor="t">
+          <a:bodyPr wrap="square" anchor="t" lIns="0" rIns="0" tIns="0" bIns="0">
             <a:spAutoFit/>
           </a:bodyPr>
           <a:lstStyle/>
@@ -6602,7 +6602,7 @@
           <a:noFill/>
         </p:spPr>
         <p:txBody>
-          <a:bodyPr wrap="square" anchor="t">
+          <a:bodyPr wrap="square" anchor="t" lIns="0" rIns="0" tIns="0" bIns="0">
             <a:spAutoFit/>
           </a:bodyPr>
           <a:lstStyle/>
@@ -6752,7 +6752,7 @@
           <a:noFill/>
         </p:spPr>
         <p:txBody>
-          <a:bodyPr wrap="square" anchor="ctr">
+          <a:bodyPr wrap="square" anchor="ctr" lIns="0" rIns="0" tIns="0" bIns="0">
             <a:spAutoFit/>
           </a:bodyPr>
           <a:lstStyle/>
@@ -6830,7 +6830,7 @@
           <a:noFill/>
         </p:spPr>
         <p:txBody>
-          <a:bodyPr wrap="square" anchor="t">
+          <a:bodyPr wrap="square" anchor="t" lIns="0" rIns="0" tIns="0" bIns="0">
             <a:spAutoFit/>
           </a:bodyPr>
           <a:lstStyle/>
@@ -6977,7 +6977,7 @@
           <a:noFill/>
         </p:spPr>
         <p:txBody>
-          <a:bodyPr wrap="square" anchor="t">
+          <a:bodyPr wrap="square" anchor="t" lIns="0" rIns="0" tIns="0" bIns="0">
             <a:spAutoFit/>
           </a:bodyPr>
           <a:lstStyle/>
@@ -7011,7 +7011,7 @@
           <a:noFill/>
         </p:spPr>
         <p:txBody>
-          <a:bodyPr wrap="square" anchor="t">
+          <a:bodyPr wrap="square" anchor="t" lIns="0" rIns="0" tIns="0" bIns="0">
             <a:spAutoFit/>
           </a:bodyPr>
           <a:lstStyle/>
@@ -7161,7 +7161,7 @@
           <a:noFill/>
         </p:spPr>
         <p:txBody>
-          <a:bodyPr wrap="square" anchor="ctr">
+          <a:bodyPr wrap="square" anchor="ctr" lIns="0" rIns="0" tIns="0" bIns="0">
             <a:spAutoFit/>
           </a:bodyPr>
           <a:lstStyle/>
@@ -7231,7 +7231,7 @@
         <p:spPr>
           <a:xfrm>
             <a:off x="685800" y="1627632"/>
-            <a:ext cx="10820095" cy="965200"/>
+            <a:ext cx="10820095" cy="959104"/>
           </a:xfrm>
           <a:prstGeom prst="rect">
             <a:avLst/>
@@ -7275,7 +7275,7 @@
         <p:spPr>
           <a:xfrm>
             <a:off x="685800" y="1627632"/>
-            <a:ext cx="50292" cy="965200"/>
+            <a:ext cx="50292" cy="959104"/>
           </a:xfrm>
           <a:prstGeom prst="rect">
             <a:avLst/>
@@ -7319,7 +7319,7 @@
         <p:spPr>
           <a:xfrm>
             <a:off x="941832" y="1719072"/>
-            <a:ext cx="10362895" cy="818896"/>
+            <a:ext cx="10362895" cy="812800"/>
           </a:xfrm>
           <a:prstGeom prst="rect">
             <a:avLst/>
@@ -7327,7 +7327,7 @@
           <a:noFill/>
         </p:spPr>
         <p:txBody>
-          <a:bodyPr wrap="square" anchor="ctr">
+          <a:bodyPr wrap="square" anchor="ctr" lIns="0" rIns="0" tIns="0" bIns="0">
             <a:spAutoFit/>
           </a:bodyPr>
           <a:lstStyle/>
@@ -7362,8 +7362,8 @@
           <p:nvPr/>
         </p:nvGraphicFramePr>
         <p:xfrm>
-          <a:off x="685800" y="2757424"/>
-          <a:ext cx="10820095" cy="2325624"/>
+          <a:off x="685800" y="2751328"/>
+          <a:ext cx="10820095" cy="1548384"/>
         </p:xfrm>
         <a:graphic>
           <a:graphicData uri="http://schemas.openxmlformats.org/drawingml/2006/table">
@@ -7372,8 +7372,8 @@
                 <a:tableStyleId>{2D5ABB26-0587-4C30-8999-92F81FD0307C}</a:tableStyleId>
               </a:tblPr>
               <a:tblGrid>
-                <a:gridCol w="5410047"/>
-                <a:gridCol w="5410048"/>
+                <a:gridCol w="2227485"/>
+                <a:gridCol w="8592610"/>
               </a:tblGrid>
               <a:tr h="387096">
                 <a:tc>
@@ -7421,7 +7421,7 @@
                   </a:tcPr>
                 </a:tc>
               </a:tr>
-              <a:tr h="646176">
+              <a:tr h="387096">
                 <a:tc>
                   <a:txBody>
                     <a:bodyPr/>
@@ -7467,7 +7467,7 @@
                   </a:tcPr>
                 </a:tc>
               </a:tr>
-              <a:tr h="646176">
+              <a:tr h="387096">
                 <a:tc>
                   <a:txBody>
                     <a:bodyPr/>
@@ -7513,7 +7513,7 @@
                   </a:tcPr>
                 </a:tc>
               </a:tr>
-              <a:tr h="646176">
+              <a:tr h="387096">
                 <a:tc>
                   <a:txBody>
                     <a:bodyPr/>
@@ -7571,8 +7571,8 @@
         </p:nvSpPr>
         <p:spPr>
           <a:xfrm>
-            <a:off x="685800" y="5339080"/>
-            <a:ext cx="10820095" cy="965200"/>
+            <a:off x="685800" y="4555744"/>
+            <a:ext cx="10820095" cy="1319784"/>
           </a:xfrm>
           <a:prstGeom prst="rect">
             <a:avLst/>
@@ -7615,8 +7615,8 @@
         </p:nvSpPr>
         <p:spPr>
           <a:xfrm>
-            <a:off x="685800" y="5339080"/>
-            <a:ext cx="50292" cy="965200"/>
+            <a:off x="685800" y="4555744"/>
+            <a:ext cx="50292" cy="1319784"/>
           </a:xfrm>
           <a:prstGeom prst="rect">
             <a:avLst/>
@@ -7659,8 +7659,8 @@
         </p:nvSpPr>
         <p:spPr>
           <a:xfrm>
-            <a:off x="941832" y="5430520"/>
-            <a:ext cx="10362895" cy="818896"/>
+            <a:off x="941832" y="4647184"/>
+            <a:ext cx="10362895" cy="1173480"/>
           </a:xfrm>
           <a:prstGeom prst="rect">
             <a:avLst/>
@@ -7668,7 +7668,7 @@
           <a:noFill/>
         </p:spPr>
         <p:txBody>
-          <a:bodyPr wrap="square" anchor="ctr">
+          <a:bodyPr wrap="square" anchor="ctr" lIns="0" rIns="0" tIns="0" bIns="0">
             <a:spAutoFit/>
           </a:bodyPr>
           <a:lstStyle/>
@@ -7755,7 +7755,7 @@
           <a:noFill/>
         </p:spPr>
         <p:txBody>
-          <a:bodyPr wrap="square" anchor="t">
+          <a:bodyPr wrap="square" anchor="t" lIns="0" rIns="0" tIns="0" bIns="0">
             <a:spAutoFit/>
           </a:bodyPr>
           <a:lstStyle/>
@@ -7789,7 +7789,7 @@
           <a:noFill/>
         </p:spPr>
         <p:txBody>
-          <a:bodyPr wrap="square" anchor="t">
+          <a:bodyPr wrap="square" anchor="t" lIns="0" rIns="0" tIns="0" bIns="0">
             <a:spAutoFit/>
           </a:bodyPr>
           <a:lstStyle/>
@@ -7939,7 +7939,7 @@
           <a:noFill/>
         </p:spPr>
         <p:txBody>
-          <a:bodyPr wrap="square" anchor="ctr">
+          <a:bodyPr wrap="square" anchor="ctr" lIns="0" rIns="0" tIns="0" bIns="0">
             <a:spAutoFit/>
           </a:bodyPr>
           <a:lstStyle/>
@@ -8017,7 +8017,7 @@
           <a:noFill/>
         </p:spPr>
         <p:txBody>
-          <a:bodyPr wrap="square" anchor="t">
+          <a:bodyPr wrap="square" anchor="t" lIns="0" rIns="0" tIns="0" bIns="0">
             <a:spAutoFit/>
           </a:bodyPr>
           <a:lstStyle/>
@@ -8051,7 +8051,7 @@
           <a:noFill/>
         </p:spPr>
         <p:txBody>
-          <a:bodyPr wrap="square" anchor="t">
+          <a:bodyPr wrap="square" anchor="t" lIns="0" rIns="0" tIns="0" bIns="0">
             <a:spAutoFit/>
           </a:bodyPr>
           <a:lstStyle/>
@@ -8085,7 +8085,7 @@
           <a:noFill/>
         </p:spPr>
         <p:txBody>
-          <a:bodyPr wrap="square" anchor="t">
+          <a:bodyPr wrap="square" anchor="t" lIns="0" rIns="0" tIns="0" bIns="0">
             <a:spAutoFit/>
           </a:bodyPr>
           <a:lstStyle/>
@@ -8119,7 +8119,7 @@
           <a:noFill/>
         </p:spPr>
         <p:txBody>
-          <a:bodyPr wrap="square" anchor="t">
+          <a:bodyPr wrap="square" anchor="t" lIns="0" rIns="0" tIns="0" bIns="0">
             <a:spAutoFit/>
           </a:bodyPr>
           <a:lstStyle/>
@@ -8153,7 +8153,7 @@
           <a:noFill/>
         </p:spPr>
         <p:txBody>
-          <a:bodyPr wrap="square" anchor="t">
+          <a:bodyPr wrap="square" anchor="t" lIns="0" rIns="0" tIns="0" bIns="0">
             <a:spAutoFit/>
           </a:bodyPr>
           <a:lstStyle/>
@@ -8187,7 +8187,7 @@
           <a:noFill/>
         </p:spPr>
         <p:txBody>
-          <a:bodyPr wrap="square" anchor="t">
+          <a:bodyPr wrap="square" anchor="t" lIns="0" rIns="0" tIns="0" bIns="0">
             <a:spAutoFit/>
           </a:bodyPr>
           <a:lstStyle/>
@@ -8221,7 +8221,7 @@
           <a:noFill/>
         </p:spPr>
         <p:txBody>
-          <a:bodyPr wrap="square" anchor="t">
+          <a:bodyPr wrap="square" anchor="t" lIns="0" rIns="0" tIns="0" bIns="0">
             <a:spAutoFit/>
           </a:bodyPr>
           <a:lstStyle/>
@@ -8255,7 +8255,7 @@
           <a:noFill/>
         </p:spPr>
         <p:txBody>
-          <a:bodyPr wrap="square" anchor="t">
+          <a:bodyPr wrap="square" anchor="t" lIns="0" rIns="0" tIns="0" bIns="0">
             <a:spAutoFit/>
           </a:bodyPr>
           <a:lstStyle/>
@@ -8333,7 +8333,7 @@
           <a:noFill/>
         </p:spPr>
         <p:txBody>
-          <a:bodyPr wrap="square" anchor="t">
+          <a:bodyPr wrap="square" anchor="t" lIns="0" rIns="0" tIns="0" bIns="0">
             <a:spAutoFit/>
           </a:bodyPr>
           <a:lstStyle/>
@@ -8367,7 +8367,7 @@
           <a:noFill/>
         </p:spPr>
         <p:txBody>
-          <a:bodyPr wrap="square" anchor="t">
+          <a:bodyPr wrap="square" anchor="t" lIns="0" rIns="0" tIns="0" bIns="0">
             <a:spAutoFit/>
           </a:bodyPr>
           <a:lstStyle/>
@@ -8464,7 +8464,7 @@
           <a:noFill/>
         </p:spPr>
         <p:txBody>
-          <a:bodyPr wrap="square" anchor="ctr">
+          <a:bodyPr wrap="square" anchor="ctr" lIns="0" rIns="0" tIns="0" bIns="0">
             <a:spAutoFit/>
           </a:bodyPr>
           <a:lstStyle/>
@@ -8808,7 +8808,7 @@
           <a:noFill/>
         </p:spPr>
         <p:txBody>
-          <a:bodyPr wrap="square" anchor="t">
+          <a:bodyPr wrap="square" anchor="t" lIns="0" rIns="0" tIns="0" bIns="0">
             <a:spAutoFit/>
           </a:bodyPr>
           <a:lstStyle/>
@@ -8842,7 +8842,7 @@
           <a:noFill/>
         </p:spPr>
         <p:txBody>
-          <a:bodyPr wrap="square" anchor="t">
+          <a:bodyPr wrap="square" anchor="t" lIns="0" rIns="0" tIns="0" bIns="0">
             <a:spAutoFit/>
           </a:bodyPr>
           <a:lstStyle/>
@@ -8992,7 +8992,7 @@
           <a:noFill/>
         </p:spPr>
         <p:txBody>
-          <a:bodyPr wrap="square" anchor="ctr">
+          <a:bodyPr wrap="square" anchor="ctr" lIns="0" rIns="0" tIns="0" bIns="0">
             <a:spAutoFit/>
           </a:bodyPr>
           <a:lstStyle/>
@@ -9053,9 +9053,321 @@
           </a:p>
         </p:txBody>
       </p:sp>
+      <p:sp>
+        <p:nvSpPr>
+          <p:cNvPr id="6" name="Rounded Rectangle 5"/>
+          <p:cNvSpPr/>
+          <p:nvPr/>
+        </p:nvSpPr>
+        <p:spPr>
+          <a:xfrm>
+            <a:off x="685800" y="1627632"/>
+            <a:ext cx="2076236" cy="475488"/>
+          </a:xfrm>
+          <a:prstGeom prst="roundRect">
+            <a:avLst/>
+          </a:prstGeom>
+          <a:solidFill>
+            <a:srgbClr val="FFFFFF"/>
+          </a:solidFill>
+          <a:ln w="9525">
+            <a:solidFill>
+              <a:srgbClr val="C9C9C2"/>
+            </a:solidFill>
+          </a:ln>
+          <a:effectLst/>
+        </p:spPr>
+        <p:style>
+          <a:lnRef idx="1">
+            <a:schemeClr val="accent1"/>
+          </a:lnRef>
+          <a:fillRef idx="3">
+            <a:schemeClr val="accent1"/>
+          </a:fillRef>
+          <a:effectRef idx="2">
+            <a:schemeClr val="accent1"/>
+          </a:effectRef>
+          <a:fontRef idx="minor">
+            <a:schemeClr val="lt1"/>
+          </a:fontRef>
+        </p:style>
+        <p:txBody>
+          <a:bodyPr rtlCol="0" anchor="ctr" wrap="square"/>
+          <a:lstStyle/>
+          <a:p>
+            <a:pPr algn="ctr"/>
+            <a:r>
+              <a:rPr sz="1200" b="0">
+                <a:solidFill>
+                  <a:srgbClr val="5F6360"/>
+                </a:solidFill>
+                <a:latin typeface="Calibri"/>
+              </a:rPr>
+              <a:t>open the workbench</a:t>
+            </a:r>
+          </a:p>
+        </p:txBody>
+      </p:sp>
+      <p:sp>
+        <p:nvSpPr>
+          <p:cNvPr id="7" name="Rounded Rectangle 6"/>
+          <p:cNvSpPr/>
+          <p:nvPr/>
+        </p:nvSpPr>
+        <p:spPr>
+          <a:xfrm>
+            <a:off x="2871764" y="1627632"/>
+            <a:ext cx="2076236" cy="475488"/>
+          </a:xfrm>
+          <a:prstGeom prst="roundRect">
+            <a:avLst/>
+          </a:prstGeom>
+          <a:solidFill>
+            <a:srgbClr val="FFFFFF"/>
+          </a:solidFill>
+          <a:ln w="9525">
+            <a:solidFill>
+              <a:srgbClr val="C9C9C2"/>
+            </a:solidFill>
+          </a:ln>
+          <a:effectLst/>
+        </p:spPr>
+        <p:style>
+          <a:lnRef idx="1">
+            <a:schemeClr val="accent1"/>
+          </a:lnRef>
+          <a:fillRef idx="3">
+            <a:schemeClr val="accent1"/>
+          </a:fillRef>
+          <a:effectRef idx="2">
+            <a:schemeClr val="accent1"/>
+          </a:effectRef>
+          <a:fontRef idx="minor">
+            <a:schemeClr val="lt1"/>
+          </a:fontRef>
+        </p:style>
+        <p:txBody>
+          <a:bodyPr rtlCol="0" anchor="ctr" wrap="square"/>
+          <a:lstStyle/>
+          <a:p>
+            <a:pPr algn="ctr"/>
+            <a:r>
+              <a:rPr sz="1200" b="0">
+                <a:solidFill>
+                  <a:srgbClr val="5F6360"/>
+                </a:solidFill>
+                <a:latin typeface="Calibri"/>
+              </a:rPr>
+              <a:t>the kernel remembers</a:t>
+            </a:r>
+          </a:p>
+        </p:txBody>
+      </p:sp>
+      <p:sp>
+        <p:nvSpPr>
+          <p:cNvPr id="8" name="Rounded Rectangle 7"/>
+          <p:cNvSpPr/>
+          <p:nvPr/>
+        </p:nvSpPr>
+        <p:spPr>
+          <a:xfrm>
+            <a:off x="5057729" y="1627632"/>
+            <a:ext cx="2076236" cy="475488"/>
+          </a:xfrm>
+          <a:prstGeom prst="roundRect">
+            <a:avLst/>
+          </a:prstGeom>
+          <a:solidFill>
+            <a:srgbClr val="FFFFFF"/>
+          </a:solidFill>
+          <a:ln w="9525">
+            <a:solidFill>
+              <a:srgbClr val="C9C9C2"/>
+            </a:solidFill>
+          </a:ln>
+          <a:effectLst/>
+        </p:spPr>
+        <p:style>
+          <a:lnRef idx="1">
+            <a:schemeClr val="accent1"/>
+          </a:lnRef>
+          <a:fillRef idx="3">
+            <a:schemeClr val="accent1"/>
+          </a:fillRef>
+          <a:effectRef idx="2">
+            <a:schemeClr val="accent1"/>
+          </a:effectRef>
+          <a:fontRef idx="minor">
+            <a:schemeClr val="lt1"/>
+          </a:fontRef>
+        </p:style>
+        <p:txBody>
+          <a:bodyPr rtlCol="0" anchor="ctr" wrap="square"/>
+          <a:lstStyle/>
+          <a:p>
+            <a:pPr algn="ctr"/>
+            <a:r>
+              <a:rPr sz="1200" b="0">
+                <a:solidFill>
+                  <a:srgbClr val="5F6360"/>
+                </a:solidFill>
+                <a:latin typeface="Calibri"/>
+              </a:rPr>
+              <a:t>type decides</a:t>
+            </a:r>
+          </a:p>
+        </p:txBody>
+      </p:sp>
+      <p:sp>
+        <p:nvSpPr>
+          <p:cNvPr id="9" name="Rounded Rectangle 8"/>
+          <p:cNvSpPr/>
+          <p:nvPr/>
+        </p:nvSpPr>
+        <p:spPr>
+          <a:xfrm>
+            <a:off x="7243693" y="1627632"/>
+            <a:ext cx="2076236" cy="475488"/>
+          </a:xfrm>
+          <a:prstGeom prst="roundRect">
+            <a:avLst/>
+          </a:prstGeom>
+          <a:solidFill>
+            <a:srgbClr val="2B4A7D"/>
+          </a:solidFill>
+          <a:ln>
+            <a:noFill/>
+          </a:ln>
+          <a:effectLst/>
+        </p:spPr>
+        <p:style>
+          <a:lnRef idx="1">
+            <a:schemeClr val="accent1"/>
+          </a:lnRef>
+          <a:fillRef idx="3">
+            <a:schemeClr val="accent1"/>
+          </a:fillRef>
+          <a:effectRef idx="2">
+            <a:schemeClr val="accent1"/>
+          </a:effectRef>
+          <a:fontRef idx="minor">
+            <a:schemeClr val="lt1"/>
+          </a:fontRef>
+        </p:style>
+        <p:txBody>
+          <a:bodyPr rtlCol="0" anchor="ctr" wrap="square"/>
+          <a:lstStyle/>
+          <a:p>
+            <a:pPr algn="ctr"/>
+            <a:r>
+              <a:rPr sz="1200" b="1">
+                <a:solidFill>
+                  <a:srgbClr val="FFFFFF"/>
+                </a:solidFill>
+                <a:latin typeface="Calibri"/>
+              </a:rPr>
+              <a:t>walk the records</a:t>
+            </a:r>
+          </a:p>
+        </p:txBody>
+      </p:sp>
+      <p:sp>
+        <p:nvSpPr>
+          <p:cNvPr id="10" name="Rounded Rectangle 9"/>
+          <p:cNvSpPr/>
+          <p:nvPr/>
+        </p:nvSpPr>
+        <p:spPr>
+          <a:xfrm>
+            <a:off x="9429658" y="1627632"/>
+            <a:ext cx="2076236" cy="475488"/>
+          </a:xfrm>
+          <a:prstGeom prst="roundRect">
+            <a:avLst/>
+          </a:prstGeom>
+          <a:solidFill>
+            <a:srgbClr val="FFFFFF"/>
+          </a:solidFill>
+          <a:ln w="9525">
+            <a:solidFill>
+              <a:srgbClr val="C9C9C2"/>
+            </a:solidFill>
+          </a:ln>
+          <a:effectLst/>
+        </p:spPr>
+        <p:style>
+          <a:lnRef idx="1">
+            <a:schemeClr val="accent1"/>
+          </a:lnRef>
+          <a:fillRef idx="3">
+            <a:schemeClr val="accent1"/>
+          </a:fillRef>
+          <a:effectRef idx="2">
+            <a:schemeClr val="accent1"/>
+          </a:effectRef>
+          <a:fontRef idx="minor">
+            <a:schemeClr val="lt1"/>
+          </a:fontRef>
+        </p:style>
+        <p:txBody>
+          <a:bodyPr rtlCol="0" anchor="ctr" wrap="square"/>
+          <a:lstStyle/>
+          <a:p>
+            <a:pPr algn="ctr"/>
+            <a:r>
+              <a:rPr sz="1200" b="0">
+                <a:solidFill>
+                  <a:srgbClr val="5F6360"/>
+                </a:solidFill>
+                <a:latin typeface="Calibri"/>
+              </a:rPr>
+              <a:t>the business answer</a:t>
+            </a:r>
+          </a:p>
+        </p:txBody>
+      </p:sp>
+      <p:sp>
+        <p:nvSpPr>
+          <p:cNvPr id="11" name="TextBox 10"/>
+          <p:cNvSpPr txBox="1"/>
+          <p:nvPr/>
+        </p:nvSpPr>
+        <p:spPr>
+          <a:xfrm>
+            <a:off x="685800" y="2304288"/>
+            <a:ext cx="10820095" cy="910336"/>
+          </a:xfrm>
+          <a:prstGeom prst="rect">
+            <a:avLst/>
+          </a:prstGeom>
+          <a:noFill/>
+        </p:spPr>
+        <p:txBody>
+          <a:bodyPr wrap="square" anchor="t" lIns="0" rIns="0" tIns="0" bIns="0">
+            <a:spAutoFit/>
+          </a:bodyPr>
+          <a:lstStyle/>
+          <a:p>
+            <a:pPr>
+              <a:spcAft>
+                <a:spcPts val="900"/>
+              </a:spcAft>
+            </a:pPr>
+            <a:r>
+              <a:rPr sz="2000" b="0">
+                <a:solidFill>
+                  <a:srgbClr val="1C1C1A"/>
+                </a:solidFill>
+                <a:latin typeface="Calibri"/>
+              </a:rPr>
+              <a:t>The kernel holds your records and you can name a value's type. Now the records have to produce a number.</a:t>
+            </a:r>
+          </a:p>
+        </p:txBody>
+      </p:sp>
       <p:pic>
         <p:nvPicPr>
-          <p:cNvPr id="6" name="Picture 5" descr="da192b0f3dd7050a.png"/>
+          <p:cNvPr id="12" name="Picture 11" descr="18ef9b8692bd3bb7.png"/>
           <p:cNvPicPr>
             <a:picLocks noChangeAspect="1"/>
           </p:cNvPicPr>
@@ -9069,7 +9381,7 @@
         </p:blipFill>
         <p:spPr>
           <a:xfrm>
-            <a:off x="685799" y="2929520"/>
+            <a:off x="685799" y="4608968"/>
             <a:ext cx="10820095" cy="511279"/>
           </a:xfrm>
           <a:prstGeom prst="rect">
@@ -9079,59 +9391,7 @@
       </p:pic>
       <p:sp>
         <p:nvSpPr>
-          <p:cNvPr id="7" name="TextBox 6"/>
-          <p:cNvSpPr txBox="1"/>
-          <p:nvPr/>
-        </p:nvSpPr>
-        <p:spPr>
-          <a:xfrm>
-            <a:off x="685800" y="4852416"/>
-            <a:ext cx="10820095" cy="1200912"/>
-          </a:xfrm>
-          <a:prstGeom prst="rect">
-            <a:avLst/>
-          </a:prstGeom>
-          <a:noFill/>
-        </p:spPr>
-        <p:txBody>
-          <a:bodyPr wrap="square" anchor="t">
-            <a:spAutoFit/>
-          </a:bodyPr>
-          <a:lstStyle/>
-          <a:p>
-            <a:r>
-              <a:rPr sz="2000" b="0">
-                <a:solidFill>
-                  <a:srgbClr val="1C1C1A"/>
-                </a:solidFill>
-                <a:latin typeface="Calibri"/>
-              </a:rPr>
-              <a:t>[open the workbench] &gt; [the kernel remembers] &gt; [type decides] &gt; </a:t>
-            </a:r>
-            <a:r>
-              <a:rPr sz="2000" b="1">
-                <a:solidFill>
-                  <a:srgbClr val="1C1C1A"/>
-                </a:solidFill>
-                <a:latin typeface="Calibri"/>
-              </a:rPr>
-              <a:t>[walk the records]</a:t>
-            </a:r>
-            <a:r>
-              <a:rPr sz="2000" b="0">
-                <a:solidFill>
-                  <a:srgbClr val="1C1C1A"/>
-                </a:solidFill>
-                <a:latin typeface="Calibri"/>
-              </a:rPr>
-              <a:t> &gt; [the business answer] The kernel holds your records and you can name a value's type. Now the records have to produce a number.</a:t>
-            </a:r>
-          </a:p>
-        </p:txBody>
-      </p:sp>
-      <p:sp>
-        <p:nvSpPr>
-          <p:cNvPr id="8" name="Rectangle 7"/>
+          <p:cNvPr id="13" name="Rectangle 12"/>
           <p:cNvSpPr/>
           <p:nvPr/>
         </p:nvSpPr>
@@ -9175,7 +9435,7 @@
       </p:sp>
       <p:sp>
         <p:nvSpPr>
-          <p:cNvPr id="9" name="TextBox 8"/>
+          <p:cNvPr id="14" name="TextBox 13"/>
           <p:cNvSpPr txBox="1"/>
           <p:nvPr/>
         </p:nvSpPr>
@@ -9190,7 +9450,7 @@
           <a:noFill/>
         </p:spPr>
         <p:txBody>
-          <a:bodyPr wrap="square" anchor="t">
+          <a:bodyPr wrap="square" anchor="t" lIns="0" rIns="0" tIns="0" bIns="0">
             <a:spAutoFit/>
           </a:bodyPr>
           <a:lstStyle/>
@@ -9209,7 +9469,7 @@
       </p:sp>
       <p:sp>
         <p:nvSpPr>
-          <p:cNvPr id="10" name="TextBox 9"/>
+          <p:cNvPr id="15" name="TextBox 14"/>
           <p:cNvSpPr txBox="1"/>
           <p:nvPr/>
         </p:nvSpPr>
@@ -9224,7 +9484,7 @@
           <a:noFill/>
         </p:spPr>
         <p:txBody>
-          <a:bodyPr wrap="square" anchor="t">
+          <a:bodyPr wrap="square" anchor="t" lIns="0" rIns="0" tIns="0" bIns="0">
             <a:spAutoFit/>
           </a:bodyPr>
           <a:lstStyle/>
@@ -9374,7 +9634,7 @@
           <a:noFill/>
         </p:spPr>
         <p:txBody>
-          <a:bodyPr wrap="square" anchor="ctr">
+          <a:bodyPr wrap="square" anchor="ctr" lIns="0" rIns="0" tIns="0" bIns="0">
             <a:spAutoFit/>
           </a:bodyPr>
           <a:lstStyle/>
@@ -9435,9 +9695,214 @@
           </a:p>
         </p:txBody>
       </p:sp>
+      <p:sp>
+        <p:nvSpPr>
+          <p:cNvPr id="6" name="Rectangle 5"/>
+          <p:cNvSpPr/>
+          <p:nvPr/>
+        </p:nvSpPr>
+        <p:spPr>
+          <a:xfrm>
+            <a:off x="685800" y="1627632"/>
+            <a:ext cx="10820095" cy="1049528"/>
+          </a:xfrm>
+          <a:prstGeom prst="rect">
+            <a:avLst/>
+          </a:prstGeom>
+          <a:solidFill>
+            <a:srgbClr val="1C1C1A"/>
+          </a:solidFill>
+          <a:ln>
+            <a:noFill/>
+          </a:ln>
+          <a:effectLst/>
+        </p:spPr>
+        <p:style>
+          <a:lnRef idx="1">
+            <a:schemeClr val="accent1"/>
+          </a:lnRef>
+          <a:fillRef idx="3">
+            <a:schemeClr val="accent1"/>
+          </a:fillRef>
+          <a:effectRef idx="2">
+            <a:schemeClr val="accent1"/>
+          </a:effectRef>
+          <a:fontRef idx="minor">
+            <a:schemeClr val="lt1"/>
+          </a:fontRef>
+        </p:style>
+        <p:txBody>
+          <a:bodyPr rtlCol="0" anchor="ctr" wrap="square"/>
+          <a:lstStyle/>
+          <a:p>
+            <a:pPr algn="ctr"/>
+          </a:p>
+        </p:txBody>
+      </p:sp>
+      <p:sp>
+        <p:nvSpPr>
+          <p:cNvPr id="7" name="Rectangle 6"/>
+          <p:cNvSpPr/>
+          <p:nvPr/>
+        </p:nvSpPr>
+        <p:spPr>
+          <a:xfrm>
+            <a:off x="685800" y="1627632"/>
+            <a:ext cx="50292" cy="1049528"/>
+          </a:xfrm>
+          <a:prstGeom prst="rect">
+            <a:avLst/>
+          </a:prstGeom>
+          <a:solidFill>
+            <a:srgbClr val="2B4A7D"/>
+          </a:solidFill>
+          <a:ln>
+            <a:noFill/>
+          </a:ln>
+          <a:effectLst/>
+        </p:spPr>
+        <p:style>
+          <a:lnRef idx="1">
+            <a:schemeClr val="accent1"/>
+          </a:lnRef>
+          <a:fillRef idx="3">
+            <a:schemeClr val="accent1"/>
+          </a:fillRef>
+          <a:effectRef idx="2">
+            <a:schemeClr val="accent1"/>
+          </a:effectRef>
+          <a:fontRef idx="minor">
+            <a:schemeClr val="lt1"/>
+          </a:fontRef>
+        </p:style>
+        <p:txBody>
+          <a:bodyPr rtlCol="0" anchor="ctr" wrap="square"/>
+          <a:lstStyle/>
+          <a:p>
+            <a:pPr algn="ctr"/>
+          </a:p>
+        </p:txBody>
+      </p:sp>
+      <p:sp>
+        <p:nvSpPr>
+          <p:cNvPr id="8" name="TextBox 7"/>
+          <p:cNvSpPr txBox="1"/>
+          <p:nvPr/>
+        </p:nvSpPr>
+        <p:spPr>
+          <a:xfrm>
+            <a:off x="923544" y="1728216"/>
+            <a:ext cx="10417759" cy="866648"/>
+          </a:xfrm>
+          <a:prstGeom prst="rect">
+            <a:avLst/>
+          </a:prstGeom>
+          <a:noFill/>
+        </p:spPr>
+        <p:txBody>
+          <a:bodyPr wrap="square" anchor="t" lIns="0" rIns="0" tIns="0" bIns="0">
+            <a:spAutoFit/>
+          </a:bodyPr>
+          <a:lstStyle/>
+          <a:p>
+            <a:pPr>
+              <a:spcAft>
+                <a:spcPts val="200"/>
+              </a:spcAft>
+            </a:pPr>
+            <a:r>
+              <a:rPr sz="1100" b="0">
+                <a:solidFill>
+                  <a:srgbClr val="E4ECF7"/>
+                </a:solidFill>
+                <a:latin typeface="Consolas"/>
+              </a:rPr>
+              <a:t>r = {"order_id": "KR4224", "segment": "Retail-Core", "amount": 1460,</a:t>
+            </a:r>
+          </a:p>
+          <a:p>
+            <a:pPr>
+              <a:spcAft>
+                <a:spcPts val="200"/>
+              </a:spcAft>
+            </a:pPr>
+            <a:r>
+              <a:rPr sz="1100" b="0">
+                <a:solidFill>
+                  <a:srgbClr val="E4ECF7"/>
+                </a:solidFill>
+                <a:latin typeface="Consolas"/>
+              </a:rPr>
+              <a:t>     "status": "delivered", "order_date": "2026-08-17"}</a:t>
+            </a:r>
+          </a:p>
+          <a:p>
+            <a:pPr>
+              <a:spcAft>
+                <a:spcPts val="200"/>
+              </a:spcAft>
+            </a:pPr>
+          </a:p>
+          <a:p>
+            <a:pPr>
+              <a:spcAft>
+                <a:spcPts val="200"/>
+              </a:spcAft>
+            </a:pPr>
+            <a:r>
+              <a:rPr sz="1100" b="0">
+                <a:solidFill>
+                  <a:srgbClr val="E4ECF7"/>
+                </a:solidFill>
+                <a:latin typeface="Consolas"/>
+              </a:rPr>
+              <a:t>r["status"]     "delivered"</a:t>
+            </a:r>
+          </a:p>
+        </p:txBody>
+      </p:sp>
+      <p:sp>
+        <p:nvSpPr>
+          <p:cNvPr id="9" name="TextBox 8"/>
+          <p:cNvSpPr txBox="1"/>
+          <p:nvPr/>
+        </p:nvSpPr>
+        <p:spPr>
+          <a:xfrm>
+            <a:off x="685800" y="2841752"/>
+            <a:ext cx="10820095" cy="668528"/>
+          </a:xfrm>
+          <a:prstGeom prst="rect">
+            <a:avLst/>
+          </a:prstGeom>
+          <a:noFill/>
+        </p:spPr>
+        <p:txBody>
+          <a:bodyPr wrap="square" anchor="t" lIns="0" rIns="0" tIns="0" bIns="0">
+            <a:spAutoFit/>
+          </a:bodyPr>
+          <a:lstStyle/>
+          <a:p>
+            <a:pPr>
+              <a:spcAft>
+                <a:spcPts val="600"/>
+              </a:spcAft>
+            </a:pPr>
+            <a:r>
+              <a:rPr sz="1300" b="0">
+                <a:solidFill>
+                  <a:srgbClr val="1C1C1A"/>
+                </a:solidFill>
+                <a:latin typeface="Calibri"/>
+              </a:rPr>
+              <a:t>A dictionary stores values under names, and you fetch a field by asking for its name. Your loop has been doing this since half one.</a:t>
+            </a:r>
+          </a:p>
+        </p:txBody>
+      </p:sp>
       <p:pic>
         <p:nvPicPr>
-          <p:cNvPr id="6" name="Picture 5" descr="0c186e6e332388ab.png"/>
+          <p:cNvPr id="10" name="Picture 9" descr="a7f2d12a59207094.png"/>
           <p:cNvPicPr>
             <a:picLocks noChangeAspect="1"/>
           </p:cNvPicPr>
@@ -9451,219 +9916,14 @@
         </p:blipFill>
         <p:spPr>
           <a:xfrm>
-            <a:off x="685800" y="2529965"/>
-            <a:ext cx="4652640" cy="2621029"/>
+            <a:off x="3985727" y="3675887"/>
+            <a:ext cx="4220240" cy="2377440"/>
           </a:xfrm>
           <a:prstGeom prst="rect">
             <a:avLst/>
           </a:prstGeom>
         </p:spPr>
       </p:pic>
-      <p:sp>
-        <p:nvSpPr>
-          <p:cNvPr id="7" name="Rectangle 6"/>
-          <p:cNvSpPr/>
-          <p:nvPr/>
-        </p:nvSpPr>
-        <p:spPr>
-          <a:xfrm>
-            <a:off x="5771244" y="2188464"/>
-            <a:ext cx="5734650" cy="1883664"/>
-          </a:xfrm>
-          <a:prstGeom prst="rect">
-            <a:avLst/>
-          </a:prstGeom>
-          <a:solidFill>
-            <a:srgbClr val="1C1C1A"/>
-          </a:solidFill>
-          <a:ln>
-            <a:noFill/>
-          </a:ln>
-          <a:effectLst/>
-        </p:spPr>
-        <p:style>
-          <a:lnRef idx="1">
-            <a:schemeClr val="accent1"/>
-          </a:lnRef>
-          <a:fillRef idx="3">
-            <a:schemeClr val="accent1"/>
-          </a:fillRef>
-          <a:effectRef idx="2">
-            <a:schemeClr val="accent1"/>
-          </a:effectRef>
-          <a:fontRef idx="minor">
-            <a:schemeClr val="lt1"/>
-          </a:fontRef>
-        </p:style>
-        <p:txBody>
-          <a:bodyPr rtlCol="0" anchor="ctr" wrap="square"/>
-          <a:lstStyle/>
-          <a:p>
-            <a:pPr algn="ctr"/>
-          </a:p>
-        </p:txBody>
-      </p:sp>
-      <p:sp>
-        <p:nvSpPr>
-          <p:cNvPr id="8" name="Rectangle 7"/>
-          <p:cNvSpPr/>
-          <p:nvPr/>
-        </p:nvSpPr>
-        <p:spPr>
-          <a:xfrm>
-            <a:off x="5771244" y="2188464"/>
-            <a:ext cx="50292" cy="1883664"/>
-          </a:xfrm>
-          <a:prstGeom prst="rect">
-            <a:avLst/>
-          </a:prstGeom>
-          <a:solidFill>
-            <a:srgbClr val="2B4A7D"/>
-          </a:solidFill>
-          <a:ln>
-            <a:noFill/>
-          </a:ln>
-          <a:effectLst/>
-        </p:spPr>
-        <p:style>
-          <a:lnRef idx="1">
-            <a:schemeClr val="accent1"/>
-          </a:lnRef>
-          <a:fillRef idx="3">
-            <a:schemeClr val="accent1"/>
-          </a:fillRef>
-          <a:effectRef idx="2">
-            <a:schemeClr val="accent1"/>
-          </a:effectRef>
-          <a:fontRef idx="minor">
-            <a:schemeClr val="lt1"/>
-          </a:fontRef>
-        </p:style>
-        <p:txBody>
-          <a:bodyPr rtlCol="0" anchor="ctr" wrap="square"/>
-          <a:lstStyle/>
-          <a:p>
-            <a:pPr algn="ctr"/>
-          </a:p>
-        </p:txBody>
-      </p:sp>
-      <p:sp>
-        <p:nvSpPr>
-          <p:cNvPr id="9" name="TextBox 8"/>
-          <p:cNvSpPr txBox="1"/>
-          <p:nvPr/>
-        </p:nvSpPr>
-        <p:spPr>
-          <a:xfrm>
-            <a:off x="6008988" y="2289048"/>
-            <a:ext cx="5332314" cy="1700784"/>
-          </a:xfrm>
-          <a:prstGeom prst="rect">
-            <a:avLst/>
-          </a:prstGeom>
-          <a:noFill/>
-        </p:spPr>
-        <p:txBody>
-          <a:bodyPr wrap="square" anchor="t">
-            <a:spAutoFit/>
-          </a:bodyPr>
-          <a:lstStyle/>
-          <a:p>
-            <a:pPr>
-              <a:spcAft>
-                <a:spcPts val="200"/>
-              </a:spcAft>
-            </a:pPr>
-            <a:r>
-              <a:rPr sz="1600" b="0">
-                <a:solidFill>
-                  <a:srgbClr val="E4ECF7"/>
-                </a:solidFill>
-                <a:latin typeface="Consolas"/>
-              </a:rPr>
-              <a:t>r = {"order_id": "KR4224", "segment": "Retail-Core", "amount": 1460,</a:t>
-            </a:r>
-          </a:p>
-          <a:p>
-            <a:pPr>
-              <a:spcAft>
-                <a:spcPts val="200"/>
-              </a:spcAft>
-            </a:pPr>
-            <a:r>
-              <a:rPr sz="1600" b="0">
-                <a:solidFill>
-                  <a:srgbClr val="E4ECF7"/>
-                </a:solidFill>
-                <a:latin typeface="Consolas"/>
-              </a:rPr>
-              <a:t>     "status": "delivered", "order_date": "2026-08-17"}</a:t>
-            </a:r>
-          </a:p>
-          <a:p>
-            <a:pPr>
-              <a:spcAft>
-                <a:spcPts val="200"/>
-              </a:spcAft>
-            </a:pPr>
-          </a:p>
-          <a:p>
-            <a:pPr>
-              <a:spcAft>
-                <a:spcPts val="200"/>
-              </a:spcAft>
-            </a:pPr>
-            <a:r>
-              <a:rPr sz="1600" b="0">
-                <a:solidFill>
-                  <a:srgbClr val="E4ECF7"/>
-                </a:solidFill>
-                <a:latin typeface="Consolas"/>
-              </a:rPr>
-              <a:t>r["status"]     "delivered"</a:t>
-            </a:r>
-          </a:p>
-        </p:txBody>
-      </p:sp>
-      <p:sp>
-        <p:nvSpPr>
-          <p:cNvPr id="10" name="TextBox 9"/>
-          <p:cNvSpPr txBox="1"/>
-          <p:nvPr/>
-        </p:nvSpPr>
-        <p:spPr>
-          <a:xfrm>
-            <a:off x="5771244" y="4236719"/>
-            <a:ext cx="5734650" cy="1255776"/>
-          </a:xfrm>
-          <a:prstGeom prst="rect">
-            <a:avLst/>
-          </a:prstGeom>
-          <a:noFill/>
-        </p:spPr>
-        <p:txBody>
-          <a:bodyPr wrap="square" anchor="t">
-            <a:spAutoFit/>
-          </a:bodyPr>
-          <a:lstStyle/>
-          <a:p>
-            <a:pPr>
-              <a:spcAft>
-                <a:spcPts val="900"/>
-              </a:spcAft>
-            </a:pPr>
-            <a:r>
-              <a:rPr sz="2000" b="0">
-                <a:solidFill>
-                  <a:srgbClr val="1C1C1A"/>
-                </a:solidFill>
-                <a:latin typeface="Calibri"/>
-              </a:rPr>
-              <a:t>A dictionary stores values under names, and you fetch a field by asking for its name. Your loop has been doing this since half one.</a:t>
-            </a:r>
-          </a:p>
-        </p:txBody>
-      </p:sp>
       <p:sp>
         <p:nvSpPr>
           <p:cNvPr id="11" name="Rectangle 10"/>
@@ -9725,7 +9985,7 @@
           <a:noFill/>
         </p:spPr>
         <p:txBody>
-          <a:bodyPr wrap="square" anchor="t">
+          <a:bodyPr wrap="square" anchor="t" lIns="0" rIns="0" tIns="0" bIns="0">
             <a:spAutoFit/>
           </a:bodyPr>
           <a:lstStyle/>
@@ -9759,7 +10019,7 @@
           <a:noFill/>
         </p:spPr>
         <p:txBody>
-          <a:bodyPr wrap="square" anchor="t">
+          <a:bodyPr wrap="square" anchor="t" lIns="0" rIns="0" tIns="0" bIns="0">
             <a:spAutoFit/>
           </a:bodyPr>
           <a:lstStyle/>
@@ -9909,7 +10169,7 @@
           <a:noFill/>
         </p:spPr>
         <p:txBody>
-          <a:bodyPr wrap="square" anchor="ctr">
+          <a:bodyPr wrap="square" anchor="ctr" lIns="0" rIns="0" tIns="0" bIns="0">
             <a:spAutoFit/>
           </a:bodyPr>
           <a:lstStyle/>
@@ -9970,9 +10230,80 @@
           </a:p>
         </p:txBody>
       </p:sp>
+      <p:sp>
+        <p:nvSpPr>
+          <p:cNvPr id="6" name="TextBox 5"/>
+          <p:cNvSpPr txBox="1"/>
+          <p:nvPr/>
+        </p:nvSpPr>
+        <p:spPr>
+          <a:xfrm>
+            <a:off x="685800" y="1627632"/>
+            <a:ext cx="10820095" cy="1613408"/>
+          </a:xfrm>
+          <a:prstGeom prst="rect">
+            <a:avLst/>
+          </a:prstGeom>
+          <a:noFill/>
+        </p:spPr>
+        <p:txBody>
+          <a:bodyPr wrap="square" anchor="t" lIns="0" rIns="0" tIns="0" bIns="0">
+            <a:spAutoFit/>
+          </a:bodyPr>
+          <a:lstStyle/>
+          <a:p>
+            <a:pPr>
+              <a:spcAft>
+                <a:spcPts val="800"/>
+              </a:spcAft>
+            </a:pPr>
+            <a:r>
+              <a:rPr sz="1700" b="0">
+                <a:solidFill>
+                  <a:srgbClr val="1C1C1A"/>
+                </a:solidFill>
+                <a:latin typeface="Calibri"/>
+              </a:rPr>
+              <a:t>Position is a promise the file never made to you.</a:t>
+            </a:r>
+          </a:p>
+          <a:p>
+            <a:pPr>
+              <a:spcAft>
+                <a:spcPts val="800"/>
+              </a:spcAft>
+            </a:pPr>
+            <a:r>
+              <a:rPr sz="1700" b="0">
+                <a:solidFill>
+                  <a:srgbClr val="1C1C1A"/>
+                </a:solidFill>
+                <a:latin typeface="Calibri"/>
+              </a:rPr>
+              <a:t>The day someone adds a column in front of the status field, every position you wrote points one field to the left, and your code keeps running and answers a different question.</a:t>
+            </a:r>
+          </a:p>
+          <a:p>
+            <a:pPr>
+              <a:spcAft>
+                <a:spcPts val="800"/>
+              </a:spcAft>
+            </a:pPr>
+            <a:r>
+              <a:rPr sz="1700" b="0">
+                <a:solidFill>
+                  <a:srgbClr val="1C1C1A"/>
+                </a:solidFill>
+                <a:latin typeface="Calibri"/>
+              </a:rPr>
+              <a:t>A name survives that reordering, and that is the whole argument.</a:t>
+            </a:r>
+          </a:p>
+        </p:txBody>
+      </p:sp>
       <p:pic>
         <p:nvPicPr>
-          <p:cNvPr id="6" name="Picture 5" descr="ee5d7f145a43dfdf.png"/>
+          <p:cNvPr id="7" name="Picture 6" descr="050ee9b2debb64b2.png"/>
           <p:cNvPicPr>
             <a:picLocks noChangeAspect="1"/>
           </p:cNvPicPr>
@@ -9986,48 +10317,14 @@
         </p:blipFill>
         <p:spPr>
           <a:xfrm>
-            <a:off x="3054700" y="1627632"/>
-            <a:ext cx="6082293" cy="2769615"/>
+            <a:off x="3485325" y="3675887"/>
+            <a:ext cx="5221044" cy="2377440"/>
           </a:xfrm>
           <a:prstGeom prst="rect">
             <a:avLst/>
           </a:prstGeom>
         </p:spPr>
       </p:pic>
-      <p:sp>
-        <p:nvSpPr>
-          <p:cNvPr id="7" name="TextBox 6"/>
-          <p:cNvSpPr txBox="1"/>
-          <p:nvPr/>
-        </p:nvSpPr>
-        <p:spPr>
-          <a:xfrm>
-            <a:off x="685800" y="4506976"/>
-            <a:ext cx="10820095" cy="1546352"/>
-          </a:xfrm>
-          <a:prstGeom prst="rect">
-            <a:avLst/>
-          </a:prstGeom>
-          <a:noFill/>
-        </p:spPr>
-        <p:txBody>
-          <a:bodyPr wrap="square" anchor="t">
-            <a:spAutoFit/>
-          </a:bodyPr>
-          <a:lstStyle/>
-          <a:p>
-            <a:r>
-              <a:rPr sz="2000" b="0">
-                <a:solidFill>
-                  <a:srgbClr val="1C1C1A"/>
-                </a:solidFill>
-                <a:latin typeface="Calibri"/>
-              </a:rPr>
-              <a:t>Position is a promise the file never made to you. The day someone adds a column in front of the status field, every position you wrote points one field to the left, and your code keeps running and answers a different question. A name survives that reordering, and that is the whole argument.</a:t>
-            </a:r>
-          </a:p>
-        </p:txBody>
-      </p:sp>
       <p:sp>
         <p:nvSpPr>
           <p:cNvPr id="8" name="Rectangle 7"/>
@@ -10089,7 +10386,7 @@
           <a:noFill/>
         </p:spPr>
         <p:txBody>
-          <a:bodyPr wrap="square" anchor="t">
+          <a:bodyPr wrap="square" anchor="t" lIns="0" rIns="0" tIns="0" bIns="0">
             <a:spAutoFit/>
           </a:bodyPr>
           <a:lstStyle/>
@@ -10123,7 +10420,7 @@
           <a:noFill/>
         </p:spPr>
         <p:txBody>
-          <a:bodyPr wrap="square" anchor="t">
+          <a:bodyPr wrap="square" anchor="t" lIns="0" rIns="0" tIns="0" bIns="0">
             <a:spAutoFit/>
           </a:bodyPr>
           <a:lstStyle/>
@@ -10273,7 +10570,7 @@
           <a:noFill/>
         </p:spPr>
         <p:txBody>
-          <a:bodyPr wrap="square" anchor="ctr">
+          <a:bodyPr wrap="square" anchor="ctr" lIns="0" rIns="0" tIns="0" bIns="0">
             <a:spAutoFit/>
           </a:bodyPr>
           <a:lstStyle/>
@@ -10336,7 +10633,7 @@
       </p:sp>
       <p:pic>
         <p:nvPicPr>
-          <p:cNvPr id="6" name="Picture 5" descr="16bf5ceb1f1d6bd8.png"/>
+          <p:cNvPr id="6" name="Picture 5" descr="ece85d7afad3cc86.png"/>
           <p:cNvPicPr>
             <a:picLocks noChangeAspect="1"/>
           </p:cNvPicPr>
@@ -10366,8 +10663,8 @@
         </p:nvSpPr>
         <p:spPr>
           <a:xfrm>
-            <a:off x="5771244" y="2332736"/>
-            <a:ext cx="5734650" cy="542543"/>
+            <a:off x="5771244" y="2330704"/>
+            <a:ext cx="5734650" cy="544576"/>
           </a:xfrm>
           <a:prstGeom prst="rect">
             <a:avLst/>
@@ -10410,8 +10707,8 @@
         </p:nvSpPr>
         <p:spPr>
           <a:xfrm>
-            <a:off x="5771244" y="2332736"/>
-            <a:ext cx="50292" cy="542543"/>
+            <a:off x="5771244" y="2330704"/>
+            <a:ext cx="50292" cy="544576"/>
           </a:xfrm>
           <a:prstGeom prst="rect">
             <a:avLst/>
@@ -10454,8 +10751,8 @@
         </p:nvSpPr>
         <p:spPr>
           <a:xfrm>
-            <a:off x="6008988" y="2433320"/>
-            <a:ext cx="5332314" cy="359663"/>
+            <a:off x="6008988" y="2431288"/>
+            <a:ext cx="5332314" cy="361696"/>
           </a:xfrm>
           <a:prstGeom prst="rect">
             <a:avLst/>
@@ -10463,7 +10760,7 @@
           <a:noFill/>
         </p:spPr>
         <p:txBody>
-          <a:bodyPr wrap="square" anchor="t">
+          <a:bodyPr wrap="square" anchor="t" lIns="0" rIns="0" tIns="0" bIns="0">
             <a:spAutoFit/>
           </a:bodyPr>
           <a:lstStyle/>
@@ -10494,7 +10791,7 @@
         <p:spPr>
           <a:xfrm>
             <a:off x="5771244" y="3039872"/>
-            <a:ext cx="5734650" cy="542543"/>
+            <a:ext cx="5734650" cy="544576"/>
           </a:xfrm>
           <a:prstGeom prst="rect">
             <a:avLst/>
@@ -10538,7 +10835,7 @@
         <p:spPr>
           <a:xfrm>
             <a:off x="5771244" y="3039872"/>
-            <a:ext cx="50292" cy="542543"/>
+            <a:ext cx="50292" cy="544576"/>
           </a:xfrm>
           <a:prstGeom prst="rect">
             <a:avLst/>
@@ -10582,7 +10879,7 @@
         <p:spPr>
           <a:xfrm>
             <a:off x="6008988" y="3140456"/>
-            <a:ext cx="5332314" cy="359663"/>
+            <a:ext cx="5332314" cy="361696"/>
           </a:xfrm>
           <a:prstGeom prst="rect">
             <a:avLst/>
@@ -10590,7 +10887,7 @@
           <a:noFill/>
         </p:spPr>
         <p:txBody>
-          <a:bodyPr wrap="square" anchor="t">
+          <a:bodyPr wrap="square" anchor="t" lIns="0" rIns="0" tIns="0" bIns="0">
             <a:spAutoFit/>
           </a:bodyPr>
           <a:lstStyle/>
@@ -10620,7 +10917,7 @@
         </p:nvSpPr>
         <p:spPr>
           <a:xfrm>
-            <a:off x="5771244" y="3747008"/>
+            <a:off x="5771244" y="3749040"/>
             <a:ext cx="5734650" cy="1601216"/>
           </a:xfrm>
           <a:prstGeom prst="rect">
@@ -10629,7 +10926,7 @@
           <a:noFill/>
         </p:spPr>
         <p:txBody>
-          <a:bodyPr wrap="square" anchor="t">
+          <a:bodyPr wrap="square" anchor="t" lIns="0" rIns="0" tIns="0" bIns="0">
             <a:spAutoFit/>
           </a:bodyPr>
           <a:lstStyle/>
@@ -10712,7 +11009,7 @@
           <a:noFill/>
         </p:spPr>
         <p:txBody>
-          <a:bodyPr wrap="square" anchor="t">
+          <a:bodyPr wrap="square" anchor="t" lIns="0" rIns="0" tIns="0" bIns="0">
             <a:spAutoFit/>
           </a:bodyPr>
           <a:lstStyle/>
@@ -10746,7 +11043,7 @@
           <a:noFill/>
         </p:spPr>
         <p:txBody>
-          <a:bodyPr wrap="square" anchor="t">
+          <a:bodyPr wrap="square" anchor="t" lIns="0" rIns="0" tIns="0" bIns="0">
             <a:spAutoFit/>
           </a:bodyPr>
           <a:lstStyle/>
@@ -10896,7 +11193,7 @@
           <a:noFill/>
         </p:spPr>
         <p:txBody>
-          <a:bodyPr wrap="square" anchor="ctr">
+          <a:bodyPr wrap="square" anchor="ctr" lIns="0" rIns="0" tIns="0" bIns="0">
             <a:spAutoFit/>
           </a:bodyPr>
           <a:lstStyle/>
@@ -10974,7 +11271,7 @@
           <a:noFill/>
         </p:spPr>
         <p:txBody>
-          <a:bodyPr wrap="square" anchor="t">
+          <a:bodyPr wrap="square" anchor="t" lIns="0" rIns="0" tIns="0" bIns="0">
             <a:spAutoFit/>
           </a:bodyPr>
           <a:lstStyle/>
@@ -11073,7 +11370,7 @@
           <a:noFill/>
         </p:spPr>
         <p:txBody>
-          <a:bodyPr wrap="square" anchor="t">
+          <a:bodyPr wrap="square" anchor="t" lIns="0" rIns="0" tIns="0" bIns="0">
             <a:spAutoFit/>
           </a:bodyPr>
           <a:lstStyle/>
@@ -11107,7 +11404,7 @@
           <a:noFill/>
         </p:spPr>
         <p:txBody>
-          <a:bodyPr wrap="square" anchor="t">
+          <a:bodyPr wrap="square" anchor="t" lIns="0" rIns="0" tIns="0" bIns="0">
             <a:spAutoFit/>
           </a:bodyPr>
           <a:lstStyle/>
@@ -11257,7 +11554,7 @@
           <a:noFill/>
         </p:spPr>
         <p:txBody>
-          <a:bodyPr wrap="square" anchor="ctr">
+          <a:bodyPr wrap="square" anchor="ctr" lIns="0" rIns="0" tIns="0" bIns="0">
             <a:spAutoFit/>
           </a:bodyPr>
           <a:lstStyle/>
@@ -11326,8 +11623,8 @@
         </p:nvSpPr>
         <p:spPr>
           <a:xfrm>
-            <a:off x="685800" y="2976880"/>
-            <a:ext cx="10820095" cy="542543"/>
+            <a:off x="685800" y="2803144"/>
+            <a:ext cx="10820095" cy="544576"/>
           </a:xfrm>
           <a:prstGeom prst="rect">
             <a:avLst/>
@@ -11370,8 +11667,8 @@
         </p:nvSpPr>
         <p:spPr>
           <a:xfrm>
-            <a:off x="685800" y="2976880"/>
-            <a:ext cx="50292" cy="542543"/>
+            <a:off x="685800" y="2803144"/>
+            <a:ext cx="50292" cy="544576"/>
           </a:xfrm>
           <a:prstGeom prst="rect">
             <a:avLst/>
@@ -11414,8 +11711,8 @@
         </p:nvSpPr>
         <p:spPr>
           <a:xfrm>
-            <a:off x="923544" y="3077464"/>
-            <a:ext cx="10417759" cy="359663"/>
+            <a:off x="923544" y="2903728"/>
+            <a:ext cx="10417759" cy="361696"/>
           </a:xfrm>
           <a:prstGeom prst="rect">
             <a:avLst/>
@@ -11423,7 +11720,7 @@
           <a:noFill/>
         </p:spPr>
         <p:txBody>
-          <a:bodyPr wrap="square" anchor="t">
+          <a:bodyPr wrap="square" anchor="t" lIns="0" rIns="0" tIns="0" bIns="0">
             <a:spAutoFit/>
           </a:bodyPr>
           <a:lstStyle/>
@@ -11453,8 +11750,8 @@
         </p:nvSpPr>
         <p:spPr>
           <a:xfrm>
-            <a:off x="685800" y="3684016"/>
-            <a:ext cx="10820095" cy="1020064"/>
+            <a:off x="685800" y="3512312"/>
+            <a:ext cx="10820095" cy="1365504"/>
           </a:xfrm>
           <a:prstGeom prst="rect">
             <a:avLst/>
@@ -11462,7 +11759,7 @@
           <a:noFill/>
         </p:spPr>
         <p:txBody>
-          <a:bodyPr wrap="square" anchor="t">
+          <a:bodyPr wrap="square" anchor="t" lIns="0" rIns="0" tIns="0" bIns="0">
             <a:spAutoFit/>
           </a:bodyPr>
           <a:lstStyle/>
@@ -11561,7 +11858,7 @@
           <a:noFill/>
         </p:spPr>
         <p:txBody>
-          <a:bodyPr wrap="square" anchor="t">
+          <a:bodyPr wrap="square" anchor="t" lIns="0" rIns="0" tIns="0" bIns="0">
             <a:spAutoFit/>
           </a:bodyPr>
           <a:lstStyle/>
@@ -11595,7 +11892,7 @@
           <a:noFill/>
         </p:spPr>
         <p:txBody>
-          <a:bodyPr wrap="square" anchor="t">
+          <a:bodyPr wrap="square" anchor="t" lIns="0" rIns="0" tIns="0" bIns="0">
             <a:spAutoFit/>
           </a:bodyPr>
           <a:lstStyle/>
@@ -11745,7 +12042,7 @@
           <a:noFill/>
         </p:spPr>
         <p:txBody>
-          <a:bodyPr wrap="square" anchor="ctr">
+          <a:bodyPr wrap="square" anchor="ctr" lIns="0" rIns="0" tIns="0" bIns="0">
             <a:spAutoFit/>
           </a:bodyPr>
           <a:lstStyle/>
@@ -11814,8 +12111,8 @@
         </p:nvSpPr>
         <p:spPr>
           <a:xfrm>
-            <a:off x="685800" y="2135632"/>
-            <a:ext cx="10820095" cy="1078992"/>
+            <a:off x="685800" y="2114296"/>
+            <a:ext cx="10820095" cy="1121664"/>
           </a:xfrm>
           <a:prstGeom prst="rect">
             <a:avLst/>
@@ -11858,8 +12155,8 @@
         </p:nvSpPr>
         <p:spPr>
           <a:xfrm>
-            <a:off x="685800" y="2135632"/>
-            <a:ext cx="50292" cy="1078992"/>
+            <a:off x="685800" y="2114296"/>
+            <a:ext cx="50292" cy="1121664"/>
           </a:xfrm>
           <a:prstGeom prst="rect">
             <a:avLst/>
@@ -11902,8 +12199,8 @@
         </p:nvSpPr>
         <p:spPr>
           <a:xfrm>
-            <a:off x="923544" y="2236216"/>
-            <a:ext cx="10417759" cy="896112"/>
+            <a:off x="923544" y="2214880"/>
+            <a:ext cx="10417759" cy="938784"/>
           </a:xfrm>
           <a:prstGeom prst="rect">
             <a:avLst/>
@@ -11911,7 +12208,7 @@
           <a:noFill/>
         </p:spPr>
         <p:txBody>
-          <a:bodyPr wrap="square" anchor="t">
+          <a:bodyPr wrap="square" anchor="t" lIns="0" rIns="0" tIns="0" bIns="0">
             <a:spAutoFit/>
           </a:bodyPr>
           <a:lstStyle/>
@@ -11973,7 +12270,7 @@
         </p:nvSpPr>
         <p:spPr>
           <a:xfrm>
-            <a:off x="685800" y="3379216"/>
+            <a:off x="685800" y="3400552"/>
             <a:ext cx="10820095" cy="2166112"/>
           </a:xfrm>
           <a:prstGeom prst="rect">
@@ -11982,7 +12279,7 @@
           <a:noFill/>
         </p:spPr>
         <p:txBody>
-          <a:bodyPr wrap="square" anchor="t">
+          <a:bodyPr wrap="square" anchor="t" lIns="0" rIns="0" tIns="0" bIns="0">
             <a:spAutoFit/>
           </a:bodyPr>
           <a:lstStyle/>
@@ -12097,7 +12394,7 @@
           <a:noFill/>
         </p:spPr>
         <p:txBody>
-          <a:bodyPr wrap="square" anchor="t">
+          <a:bodyPr wrap="square" anchor="t" lIns="0" rIns="0" tIns="0" bIns="0">
             <a:spAutoFit/>
           </a:bodyPr>
           <a:lstStyle/>
@@ -12131,7 +12428,7 @@
           <a:noFill/>
         </p:spPr>
         <p:txBody>
-          <a:bodyPr wrap="square" anchor="t">
+          <a:bodyPr wrap="square" anchor="t" lIns="0" rIns="0" tIns="0" bIns="0">
             <a:spAutoFit/>
           </a:bodyPr>
           <a:lstStyle/>
@@ -12281,7 +12578,7 @@
           <a:noFill/>
         </p:spPr>
         <p:txBody>
-          <a:bodyPr wrap="square" anchor="ctr">
+          <a:bodyPr wrap="square" anchor="ctr" lIns="0" rIns="0" tIns="0" bIns="0">
             <a:spAutoFit/>
           </a:bodyPr>
           <a:lstStyle/>
@@ -12359,7 +12656,7 @@
           <a:noFill/>
         </p:spPr>
         <p:txBody>
-          <a:bodyPr wrap="square" anchor="t">
+          <a:bodyPr wrap="square" anchor="t" lIns="0" rIns="0" tIns="0" bIns="0">
             <a:spAutoFit/>
           </a:bodyPr>
           <a:lstStyle/>
@@ -12474,7 +12771,7 @@
           <a:noFill/>
         </p:spPr>
         <p:txBody>
-          <a:bodyPr wrap="square" anchor="t">
+          <a:bodyPr wrap="square" anchor="t" lIns="0" rIns="0" tIns="0" bIns="0">
             <a:spAutoFit/>
           </a:bodyPr>
           <a:lstStyle/>
@@ -12508,7 +12805,7 @@
           <a:noFill/>
         </p:spPr>
         <p:txBody>
-          <a:bodyPr wrap="square" anchor="t">
+          <a:bodyPr wrap="square" anchor="t" lIns="0" rIns="0" tIns="0" bIns="0">
             <a:spAutoFit/>
           </a:bodyPr>
           <a:lstStyle/>
@@ -12658,7 +12955,7 @@
           <a:noFill/>
         </p:spPr>
         <p:txBody>
-          <a:bodyPr wrap="square" anchor="ctr">
+          <a:bodyPr wrap="square" anchor="ctr" lIns="0" rIns="0" tIns="0" bIns="0">
             <a:spAutoFit/>
           </a:bodyPr>
           <a:lstStyle/>
@@ -12736,7 +13033,7 @@
           <a:noFill/>
         </p:spPr>
         <p:txBody>
-          <a:bodyPr wrap="square" anchor="t">
+          <a:bodyPr wrap="square" anchor="t" lIns="0" rIns="0" tIns="0" bIns="0">
             <a:spAutoFit/>
           </a:bodyPr>
           <a:lstStyle/>
@@ -12770,7 +13067,7 @@
           <a:noFill/>
         </p:spPr>
         <p:txBody>
-          <a:bodyPr wrap="square" anchor="t">
+          <a:bodyPr wrap="square" anchor="t" lIns="0" rIns="0" tIns="0" bIns="0">
             <a:spAutoFit/>
           </a:bodyPr>
           <a:lstStyle/>
@@ -12804,7 +13101,7 @@
           <a:noFill/>
         </p:spPr>
         <p:txBody>
-          <a:bodyPr wrap="square" anchor="t">
+          <a:bodyPr wrap="square" anchor="t" lIns="0" rIns="0" tIns="0" bIns="0">
             <a:spAutoFit/>
           </a:bodyPr>
           <a:lstStyle/>
@@ -12838,7 +13135,7 @@
           <a:noFill/>
         </p:spPr>
         <p:txBody>
-          <a:bodyPr wrap="square" anchor="t">
+          <a:bodyPr wrap="square" anchor="t" lIns="0" rIns="0" tIns="0" bIns="0">
             <a:spAutoFit/>
           </a:bodyPr>
           <a:lstStyle/>
@@ -12872,7 +13169,7 @@
           <a:noFill/>
         </p:spPr>
         <p:txBody>
-          <a:bodyPr wrap="square" anchor="t">
+          <a:bodyPr wrap="square" anchor="t" lIns="0" rIns="0" tIns="0" bIns="0">
             <a:spAutoFit/>
           </a:bodyPr>
           <a:lstStyle/>
@@ -12906,7 +13203,7 @@
           <a:noFill/>
         </p:spPr>
         <p:txBody>
-          <a:bodyPr wrap="square" anchor="t">
+          <a:bodyPr wrap="square" anchor="t" lIns="0" rIns="0" tIns="0" bIns="0">
             <a:spAutoFit/>
           </a:bodyPr>
           <a:lstStyle/>
@@ -12940,7 +13237,7 @@
           <a:noFill/>
         </p:spPr>
         <p:txBody>
-          <a:bodyPr wrap="square" anchor="t">
+          <a:bodyPr wrap="square" anchor="t" lIns="0" rIns="0" tIns="0" bIns="0">
             <a:spAutoFit/>
           </a:bodyPr>
           <a:lstStyle/>
@@ -12974,7 +13271,7 @@
           <a:noFill/>
         </p:spPr>
         <p:txBody>
-          <a:bodyPr wrap="square" anchor="t">
+          <a:bodyPr wrap="square" anchor="t" lIns="0" rIns="0" tIns="0" bIns="0">
             <a:spAutoFit/>
           </a:bodyPr>
           <a:lstStyle/>
@@ -13052,7 +13349,7 @@
           <a:noFill/>
         </p:spPr>
         <p:txBody>
-          <a:bodyPr wrap="square" anchor="t">
+          <a:bodyPr wrap="square" anchor="t" lIns="0" rIns="0" tIns="0" bIns="0">
             <a:spAutoFit/>
           </a:bodyPr>
           <a:lstStyle/>
@@ -13086,7 +13383,7 @@
           <a:noFill/>
         </p:spPr>
         <p:txBody>
-          <a:bodyPr wrap="square" anchor="t">
+          <a:bodyPr wrap="square" anchor="t" lIns="0" rIns="0" tIns="0" bIns="0">
             <a:spAutoFit/>
           </a:bodyPr>
           <a:lstStyle/>
@@ -13183,7 +13480,7 @@
           <a:noFill/>
         </p:spPr>
         <p:txBody>
-          <a:bodyPr wrap="square" anchor="ctr">
+          <a:bodyPr wrap="square" anchor="ctr" lIns="0" rIns="0" tIns="0" bIns="0">
             <a:spAutoFit/>
           </a:bodyPr>
           <a:lstStyle/>
@@ -13527,7 +13824,7 @@
           <a:noFill/>
         </p:spPr>
         <p:txBody>
-          <a:bodyPr wrap="square" anchor="t">
+          <a:bodyPr wrap="square" anchor="t" lIns="0" rIns="0" tIns="0" bIns="0">
             <a:spAutoFit/>
           </a:bodyPr>
           <a:lstStyle/>
@@ -13561,7 +13858,7 @@
           <a:noFill/>
         </p:spPr>
         <p:txBody>
-          <a:bodyPr wrap="square" anchor="t">
+          <a:bodyPr wrap="square" anchor="t" lIns="0" rIns="0" tIns="0" bIns="0">
             <a:spAutoFit/>
           </a:bodyPr>
           <a:lstStyle/>
@@ -13711,7 +14008,7 @@
           <a:noFill/>
         </p:spPr>
         <p:txBody>
-          <a:bodyPr wrap="square" anchor="ctr">
+          <a:bodyPr wrap="square" anchor="ctr" lIns="0" rIns="0" tIns="0" bIns="0">
             <a:spAutoFit/>
           </a:bodyPr>
           <a:lstStyle/>
@@ -13772,9 +14069,223 @@
           </a:p>
         </p:txBody>
       </p:sp>
+      <p:sp>
+        <p:nvSpPr>
+          <p:cNvPr id="6" name="Rectangle 5"/>
+          <p:cNvSpPr/>
+          <p:nvPr/>
+        </p:nvSpPr>
+        <p:spPr>
+          <a:xfrm>
+            <a:off x="685800" y="1627632"/>
+            <a:ext cx="10820095" cy="1049528"/>
+          </a:xfrm>
+          <a:prstGeom prst="rect">
+            <a:avLst/>
+          </a:prstGeom>
+          <a:solidFill>
+            <a:srgbClr val="1C1C1A"/>
+          </a:solidFill>
+          <a:ln>
+            <a:noFill/>
+          </a:ln>
+          <a:effectLst/>
+        </p:spPr>
+        <p:style>
+          <a:lnRef idx="1">
+            <a:schemeClr val="accent1"/>
+          </a:lnRef>
+          <a:fillRef idx="3">
+            <a:schemeClr val="accent1"/>
+          </a:fillRef>
+          <a:effectRef idx="2">
+            <a:schemeClr val="accent1"/>
+          </a:effectRef>
+          <a:fontRef idx="minor">
+            <a:schemeClr val="lt1"/>
+          </a:fontRef>
+        </p:style>
+        <p:txBody>
+          <a:bodyPr rtlCol="0" anchor="ctr" wrap="square"/>
+          <a:lstStyle/>
+          <a:p>
+            <a:pPr algn="ctr"/>
+          </a:p>
+        </p:txBody>
+      </p:sp>
+      <p:sp>
+        <p:nvSpPr>
+          <p:cNvPr id="7" name="Rectangle 6"/>
+          <p:cNvSpPr/>
+          <p:nvPr/>
+        </p:nvSpPr>
+        <p:spPr>
+          <a:xfrm>
+            <a:off x="685800" y="1627632"/>
+            <a:ext cx="50292" cy="1049528"/>
+          </a:xfrm>
+          <a:prstGeom prst="rect">
+            <a:avLst/>
+          </a:prstGeom>
+          <a:solidFill>
+            <a:srgbClr val="2B4A7D"/>
+          </a:solidFill>
+          <a:ln>
+            <a:noFill/>
+          </a:ln>
+          <a:effectLst/>
+        </p:spPr>
+        <p:style>
+          <a:lnRef idx="1">
+            <a:schemeClr val="accent1"/>
+          </a:lnRef>
+          <a:fillRef idx="3">
+            <a:schemeClr val="accent1"/>
+          </a:fillRef>
+          <a:effectRef idx="2">
+            <a:schemeClr val="accent1"/>
+          </a:effectRef>
+          <a:fontRef idx="minor">
+            <a:schemeClr val="lt1"/>
+          </a:fontRef>
+        </p:style>
+        <p:txBody>
+          <a:bodyPr rtlCol="0" anchor="ctr" wrap="square"/>
+          <a:lstStyle/>
+          <a:p>
+            <a:pPr algn="ctr"/>
+          </a:p>
+        </p:txBody>
+      </p:sp>
+      <p:sp>
+        <p:nvSpPr>
+          <p:cNvPr id="8" name="TextBox 7"/>
+          <p:cNvSpPr txBox="1"/>
+          <p:nvPr/>
+        </p:nvSpPr>
+        <p:spPr>
+          <a:xfrm>
+            <a:off x="923544" y="1728216"/>
+            <a:ext cx="10417759" cy="866648"/>
+          </a:xfrm>
+          <a:prstGeom prst="rect">
+            <a:avLst/>
+          </a:prstGeom>
+          <a:noFill/>
+        </p:spPr>
+        <p:txBody>
+          <a:bodyPr wrap="square" anchor="t" lIns="0" rIns="0" tIns="0" bIns="0">
+            <a:spAutoFit/>
+          </a:bodyPr>
+          <a:lstStyle/>
+          <a:p>
+            <a:pPr>
+              <a:spcAft>
+                <a:spcPts val="200"/>
+              </a:spcAft>
+            </a:pPr>
+            <a:r>
+              <a:rPr sz="1100" b="0">
+                <a:solidFill>
+                  <a:srgbClr val="E4ECF7"/>
+                </a:solidFill>
+                <a:latin typeface="Consolas"/>
+              </a:rPr>
+              <a:t>records = [</a:t>
+            </a:r>
+          </a:p>
+          <a:p>
+            <a:pPr>
+              <a:spcAft>
+                <a:spcPts val="200"/>
+              </a:spcAft>
+            </a:pPr>
+            <a:r>
+              <a:rPr sz="1100" b="0">
+                <a:solidFill>
+                  <a:srgbClr val="E4ECF7"/>
+                </a:solidFill>
+                <a:latin typeface="Consolas"/>
+              </a:rPr>
+              <a:t>    {"order_id": "KR4200", "segment": "Retail-Core", "amount": "4500", "status": "returned", "order_date": "2026-08-03"},</a:t>
+            </a:r>
+          </a:p>
+          <a:p>
+            <a:pPr>
+              <a:spcAft>
+                <a:spcPts val="200"/>
+              </a:spcAft>
+            </a:pPr>
+            <a:r>
+              <a:rPr sz="1100" b="0">
+                <a:solidFill>
+                  <a:srgbClr val="E4ECF7"/>
+                </a:solidFill>
+                <a:latin typeface="Consolas"/>
+              </a:rPr>
+              <a:t>    {"order_id": "KR4201", "segment": "Retail-Plus", "amount": 2395, "status": "delivered", "order_date": "2026-08-03"},</a:t>
+            </a:r>
+          </a:p>
+          <a:p>
+            <a:pPr>
+              <a:spcAft>
+                <a:spcPts val="200"/>
+              </a:spcAft>
+            </a:pPr>
+            <a:r>
+              <a:rPr sz="1100" b="0">
+                <a:solidFill>
+                  <a:srgbClr val="E4ECF7"/>
+                </a:solidFill>
+                <a:latin typeface="Consolas"/>
+              </a:rPr>
+              <a:t>]</a:t>
+            </a:r>
+          </a:p>
+        </p:txBody>
+      </p:sp>
+      <p:sp>
+        <p:nvSpPr>
+          <p:cNvPr id="9" name="TextBox 8"/>
+          <p:cNvSpPr txBox="1"/>
+          <p:nvPr/>
+        </p:nvSpPr>
+        <p:spPr>
+          <a:xfrm>
+            <a:off x="685800" y="2841752"/>
+            <a:ext cx="10820095" cy="668528"/>
+          </a:xfrm>
+          <a:prstGeom prst="rect">
+            <a:avLst/>
+          </a:prstGeom>
+          <a:noFill/>
+        </p:spPr>
+        <p:txBody>
+          <a:bodyPr wrap="square" anchor="t" lIns="0" rIns="0" tIns="0" bIns="0">
+            <a:spAutoFit/>
+          </a:bodyPr>
+          <a:lstStyle/>
+          <a:p>
+            <a:pPr>
+              <a:spcAft>
+                <a:spcPts val="600"/>
+              </a:spcAft>
+            </a:pPr>
+            <a:r>
+              <a:rPr sz="1300" b="0">
+                <a:solidFill>
+                  <a:srgbClr val="1C1C1A"/>
+                </a:solidFill>
+                <a:latin typeface="Calibri"/>
+              </a:rPr>
+              <a:t>Thirty records in one list, and each record is a dictionary carrying the same field names. That is the entire shape of the data you have worked on all day.</a:t>
+            </a:r>
+          </a:p>
+        </p:txBody>
+      </p:sp>
       <p:pic>
         <p:nvPicPr>
-          <p:cNvPr id="6" name="Picture 5" descr="0c186e6e332388ab.png"/>
+          <p:cNvPr id="10" name="Picture 9" descr="a7f2d12a59207094.png"/>
           <p:cNvPicPr>
             <a:picLocks noChangeAspect="1"/>
           </p:cNvPicPr>
@@ -13788,228 +14299,14 @@
         </p:blipFill>
         <p:spPr>
           <a:xfrm>
-            <a:off x="685800" y="2529965"/>
-            <a:ext cx="4652640" cy="2621029"/>
+            <a:off x="3985727" y="3675887"/>
+            <a:ext cx="4220240" cy="2377440"/>
           </a:xfrm>
           <a:prstGeom prst="rect">
             <a:avLst/>
           </a:prstGeom>
         </p:spPr>
       </p:pic>
-      <p:sp>
-        <p:nvSpPr>
-          <p:cNvPr id="7" name="Rectangle 6"/>
-          <p:cNvSpPr/>
-          <p:nvPr/>
-        </p:nvSpPr>
-        <p:spPr>
-          <a:xfrm>
-            <a:off x="5771244" y="1627632"/>
-            <a:ext cx="5734650" cy="2420112"/>
-          </a:xfrm>
-          <a:prstGeom prst="rect">
-            <a:avLst/>
-          </a:prstGeom>
-          <a:solidFill>
-            <a:srgbClr val="1C1C1A"/>
-          </a:solidFill>
-          <a:ln>
-            <a:noFill/>
-          </a:ln>
-          <a:effectLst/>
-        </p:spPr>
-        <p:style>
-          <a:lnRef idx="1">
-            <a:schemeClr val="accent1"/>
-          </a:lnRef>
-          <a:fillRef idx="3">
-            <a:schemeClr val="accent1"/>
-          </a:fillRef>
-          <a:effectRef idx="2">
-            <a:schemeClr val="accent1"/>
-          </a:effectRef>
-          <a:fontRef idx="minor">
-            <a:schemeClr val="lt1"/>
-          </a:fontRef>
-        </p:style>
-        <p:txBody>
-          <a:bodyPr rtlCol="0" anchor="ctr" wrap="square"/>
-          <a:lstStyle/>
-          <a:p>
-            <a:pPr algn="ctr"/>
-          </a:p>
-        </p:txBody>
-      </p:sp>
-      <p:sp>
-        <p:nvSpPr>
-          <p:cNvPr id="8" name="Rectangle 7"/>
-          <p:cNvSpPr/>
-          <p:nvPr/>
-        </p:nvSpPr>
-        <p:spPr>
-          <a:xfrm>
-            <a:off x="5771244" y="1627632"/>
-            <a:ext cx="50292" cy="2420112"/>
-          </a:xfrm>
-          <a:prstGeom prst="rect">
-            <a:avLst/>
-          </a:prstGeom>
-          <a:solidFill>
-            <a:srgbClr val="2B4A7D"/>
-          </a:solidFill>
-          <a:ln>
-            <a:noFill/>
-          </a:ln>
-          <a:effectLst/>
-        </p:spPr>
-        <p:style>
-          <a:lnRef idx="1">
-            <a:schemeClr val="accent1"/>
-          </a:lnRef>
-          <a:fillRef idx="3">
-            <a:schemeClr val="accent1"/>
-          </a:fillRef>
-          <a:effectRef idx="2">
-            <a:schemeClr val="accent1"/>
-          </a:effectRef>
-          <a:fontRef idx="minor">
-            <a:schemeClr val="lt1"/>
-          </a:fontRef>
-        </p:style>
-        <p:txBody>
-          <a:bodyPr rtlCol="0" anchor="ctr" wrap="square"/>
-          <a:lstStyle/>
-          <a:p>
-            <a:pPr algn="ctr"/>
-          </a:p>
-        </p:txBody>
-      </p:sp>
-      <p:sp>
-        <p:nvSpPr>
-          <p:cNvPr id="9" name="TextBox 8"/>
-          <p:cNvSpPr txBox="1"/>
-          <p:nvPr/>
-        </p:nvSpPr>
-        <p:spPr>
-          <a:xfrm>
-            <a:off x="6008988" y="1728216"/>
-            <a:ext cx="5332314" cy="2237231"/>
-          </a:xfrm>
-          <a:prstGeom prst="rect">
-            <a:avLst/>
-          </a:prstGeom>
-          <a:noFill/>
-        </p:spPr>
-        <p:txBody>
-          <a:bodyPr wrap="square" anchor="t">
-            <a:spAutoFit/>
-          </a:bodyPr>
-          <a:lstStyle/>
-          <a:p>
-            <a:pPr>
-              <a:spcAft>
-                <a:spcPts val="200"/>
-              </a:spcAft>
-            </a:pPr>
-            <a:r>
-              <a:rPr sz="1600" b="0">
-                <a:solidFill>
-                  <a:srgbClr val="E4ECF7"/>
-                </a:solidFill>
-                <a:latin typeface="Consolas"/>
-              </a:rPr>
-              <a:t>records = [</a:t>
-            </a:r>
-          </a:p>
-          <a:p>
-            <a:pPr>
-              <a:spcAft>
-                <a:spcPts val="200"/>
-              </a:spcAft>
-            </a:pPr>
-            <a:r>
-              <a:rPr sz="1600" b="0">
-                <a:solidFill>
-                  <a:srgbClr val="E4ECF7"/>
-                </a:solidFill>
-                <a:latin typeface="Consolas"/>
-              </a:rPr>
-              <a:t>    {"order_id": "KR4200", "segment": "Retail-Core", "amount": "4500", "status": "returned", "order_date": "2026-08-03"},</a:t>
-            </a:r>
-          </a:p>
-          <a:p>
-            <a:pPr>
-              <a:spcAft>
-                <a:spcPts val="200"/>
-              </a:spcAft>
-            </a:pPr>
-            <a:r>
-              <a:rPr sz="1600" b="0">
-                <a:solidFill>
-                  <a:srgbClr val="E4ECF7"/>
-                </a:solidFill>
-                <a:latin typeface="Consolas"/>
-              </a:rPr>
-              <a:t>    {"order_id": "KR4201", "segment": "Retail-Plus", "amount": 2395, "status": "delivered", "order_date": "2026-08-03"},</a:t>
-            </a:r>
-          </a:p>
-          <a:p>
-            <a:pPr>
-              <a:spcAft>
-                <a:spcPts val="200"/>
-              </a:spcAft>
-            </a:pPr>
-            <a:r>
-              <a:rPr sz="1600" b="0">
-                <a:solidFill>
-                  <a:srgbClr val="E4ECF7"/>
-                </a:solidFill>
-                <a:latin typeface="Consolas"/>
-              </a:rPr>
-              <a:t>]</a:t>
-            </a:r>
-          </a:p>
-        </p:txBody>
-      </p:sp>
-      <p:sp>
-        <p:nvSpPr>
-          <p:cNvPr id="10" name="TextBox 9"/>
-          <p:cNvSpPr txBox="1"/>
-          <p:nvPr/>
-        </p:nvSpPr>
-        <p:spPr>
-          <a:xfrm>
-            <a:off x="5771244" y="4212336"/>
-            <a:ext cx="5734650" cy="1601216"/>
-          </a:xfrm>
-          <a:prstGeom prst="rect">
-            <a:avLst/>
-          </a:prstGeom>
-          <a:noFill/>
-        </p:spPr>
-        <p:txBody>
-          <a:bodyPr wrap="square" anchor="t">
-            <a:spAutoFit/>
-          </a:bodyPr>
-          <a:lstStyle/>
-          <a:p>
-            <a:pPr>
-              <a:spcAft>
-                <a:spcPts val="900"/>
-              </a:spcAft>
-            </a:pPr>
-            <a:r>
-              <a:rPr sz="2000" b="0">
-                <a:solidFill>
-                  <a:srgbClr val="1C1C1A"/>
-                </a:solidFill>
-                <a:latin typeface="Calibri"/>
-              </a:rPr>
-              <a:t>Thirty records in one list, and each record is a dictionary carrying the same field names. That is the entire shape of the data you have worked on all day.</a:t>
-            </a:r>
-          </a:p>
-        </p:txBody>
-      </p:sp>
       <p:sp>
         <p:nvSpPr>
           <p:cNvPr id="11" name="Rectangle 10"/>
@@ -14071,7 +14368,7 @@
           <a:noFill/>
         </p:spPr>
         <p:txBody>
-          <a:bodyPr wrap="square" anchor="t">
+          <a:bodyPr wrap="square" anchor="t" lIns="0" rIns="0" tIns="0" bIns="0">
             <a:spAutoFit/>
           </a:bodyPr>
           <a:lstStyle/>
@@ -14105,7 +14402,7 @@
           <a:noFill/>
         </p:spPr>
         <p:txBody>
-          <a:bodyPr wrap="square" anchor="t">
+          <a:bodyPr wrap="square" anchor="t" lIns="0" rIns="0" tIns="0" bIns="0">
             <a:spAutoFit/>
           </a:bodyPr>
           <a:lstStyle/>
@@ -14255,7 +14552,7 @@
           <a:noFill/>
         </p:spPr>
         <p:txBody>
-          <a:bodyPr wrap="square" anchor="ctr">
+          <a:bodyPr wrap="square" anchor="ctr" lIns="0" rIns="0" tIns="0" bIns="0">
             <a:spAutoFit/>
           </a:bodyPr>
           <a:lstStyle/>
@@ -14333,7 +14630,7 @@
           <a:noFill/>
         </p:spPr>
         <p:txBody>
-          <a:bodyPr wrap="square" anchor="t">
+          <a:bodyPr wrap="square" anchor="t" lIns="0" rIns="0" tIns="0" bIns="0">
             <a:spAutoFit/>
           </a:bodyPr>
           <a:lstStyle/>
@@ -14432,7 +14729,7 @@
           <a:noFill/>
         </p:spPr>
         <p:txBody>
-          <a:bodyPr wrap="square" anchor="t">
+          <a:bodyPr wrap="square" anchor="t" lIns="0" rIns="0" tIns="0" bIns="0">
             <a:spAutoFit/>
           </a:bodyPr>
           <a:lstStyle/>
@@ -14466,7 +14763,7 @@
           <a:noFill/>
         </p:spPr>
         <p:txBody>
-          <a:bodyPr wrap="square" anchor="t">
+          <a:bodyPr wrap="square" anchor="t" lIns="0" rIns="0" tIns="0" bIns="0">
             <a:spAutoFit/>
           </a:bodyPr>
           <a:lstStyle/>
@@ -14616,7 +14913,7 @@
           <a:noFill/>
         </p:spPr>
         <p:txBody>
-          <a:bodyPr wrap="square" anchor="ctr">
+          <a:bodyPr wrap="square" anchor="ctr" lIns="0" rIns="0" tIns="0" bIns="0">
             <a:spAutoFit/>
           </a:bodyPr>
           <a:lstStyle/>
@@ -14679,7 +14976,7 @@
       </p:sp>
       <p:pic>
         <p:nvPicPr>
-          <p:cNvPr id="6" name="Picture 5" descr="d31fcd36e73b95e8.png"/>
+          <p:cNvPr id="6" name="Picture 5" descr="d1f54a66c111c316.png"/>
           <p:cNvPicPr>
             <a:picLocks noChangeAspect="1"/>
           </p:cNvPicPr>
@@ -14709,8 +15006,8 @@
         </p:nvSpPr>
         <p:spPr>
           <a:xfrm>
-            <a:off x="5771244" y="1627632"/>
-            <a:ext cx="5734650" cy="1347216"/>
+            <a:off x="5771244" y="1932940"/>
+            <a:ext cx="5734650" cy="1265936"/>
           </a:xfrm>
           <a:prstGeom prst="rect">
             <a:avLst/>
@@ -14753,8 +15050,8 @@
         </p:nvSpPr>
         <p:spPr>
           <a:xfrm>
-            <a:off x="5771244" y="1627632"/>
-            <a:ext cx="50292" cy="1347216"/>
+            <a:off x="5771244" y="1932940"/>
+            <a:ext cx="50292" cy="1265936"/>
           </a:xfrm>
           <a:prstGeom prst="rect">
             <a:avLst/>
@@ -14797,8 +15094,8 @@
         </p:nvSpPr>
         <p:spPr>
           <a:xfrm>
-            <a:off x="6008988" y="1728216"/>
-            <a:ext cx="5332314" cy="1164336"/>
+            <a:off x="6008988" y="2033524"/>
+            <a:ext cx="5332314" cy="1083056"/>
           </a:xfrm>
           <a:prstGeom prst="rect">
             <a:avLst/>
@@ -14806,7 +15103,7 @@
           <a:noFill/>
         </p:spPr>
         <p:txBody>
-          <a:bodyPr wrap="square" anchor="t">
+          <a:bodyPr wrap="square" anchor="t" lIns="0" rIns="0" tIns="0" bIns="0">
             <a:spAutoFit/>
           </a:bodyPr>
           <a:lstStyle/>
@@ -14817,7 +15114,7 @@
               </a:spcAft>
             </a:pPr>
             <a:r>
-              <a:rPr sz="1600" b="0">
+              <a:rPr sz="1400" b="0">
                 <a:solidFill>
                   <a:srgbClr val="E4ECF7"/>
                 </a:solidFill>
@@ -14833,7 +15130,7 @@
               </a:spcAft>
             </a:pPr>
             <a:r>
-              <a:rPr sz="1600" b="0">
+              <a:rPr sz="1400" b="0">
                 <a:solidFill>
                   <a:srgbClr val="E4ECF7"/>
                 </a:solidFill>
@@ -14849,7 +15146,7 @@
               </a:spcAft>
             </a:pPr>
             <a:r>
-              <a:rPr sz="1600" b="0">
+              <a:rPr sz="1400" b="0">
                 <a:solidFill>
                   <a:srgbClr val="E4ECF7"/>
                 </a:solidFill>
@@ -14865,7 +15162,7 @@
               </a:spcAft>
             </a:pPr>
             <a:r>
-              <a:rPr sz="1600" b="0">
+              <a:rPr sz="1400" b="0">
                 <a:solidFill>
                   <a:srgbClr val="E4ECF7"/>
                 </a:solidFill>
@@ -14884,8 +15181,8 @@
         </p:nvSpPr>
         <p:spPr>
           <a:xfrm>
-            <a:off x="5771244" y="3139440"/>
-            <a:ext cx="5734650" cy="3092704"/>
+            <a:off x="5771244" y="3363468"/>
+            <a:ext cx="5734650" cy="2384552"/>
           </a:xfrm>
           <a:prstGeom prst="rect">
             <a:avLst/>
@@ -14893,18 +15190,18 @@
           <a:noFill/>
         </p:spPr>
         <p:txBody>
-          <a:bodyPr wrap="square" anchor="t">
+          <a:bodyPr wrap="square" anchor="t" lIns="0" rIns="0" tIns="0" bIns="0">
             <a:spAutoFit/>
           </a:bodyPr>
           <a:lstStyle/>
           <a:p>
             <a:pPr>
               <a:spcAft>
-                <a:spcPts val="900"/>
+                <a:spcPts val="800"/>
               </a:spcAft>
             </a:pPr>
             <a:r>
-              <a:rPr sz="2000" b="0">
+              <a:rPr sz="1700" b="0">
                 <a:solidFill>
                   <a:srgbClr val="1C1C1A"/>
                 </a:solidFill>
@@ -14916,11 +15213,11 @@
           <a:p>
             <a:pPr>
               <a:spcAft>
-                <a:spcPts val="900"/>
+                <a:spcPts val="800"/>
               </a:spcAft>
             </a:pPr>
             <a:r>
-              <a:rPr sz="2000" b="0">
+              <a:rPr sz="1700" b="0">
                 <a:solidFill>
                   <a:srgbClr val="1C1C1A"/>
                 </a:solidFill>
@@ -14992,7 +15289,7 @@
           <a:noFill/>
         </p:spPr>
         <p:txBody>
-          <a:bodyPr wrap="square" anchor="t">
+          <a:bodyPr wrap="square" anchor="t" lIns="0" rIns="0" tIns="0" bIns="0">
             <a:spAutoFit/>
           </a:bodyPr>
           <a:lstStyle/>
@@ -15026,7 +15323,7 @@
           <a:noFill/>
         </p:spPr>
         <p:txBody>
-          <a:bodyPr wrap="square" anchor="t">
+          <a:bodyPr wrap="square" anchor="t" lIns="0" rIns="0" tIns="0" bIns="0">
             <a:spAutoFit/>
           </a:bodyPr>
           <a:lstStyle/>
@@ -15176,7 +15473,7 @@
           <a:noFill/>
         </p:spPr>
         <p:txBody>
-          <a:bodyPr wrap="square" anchor="ctr">
+          <a:bodyPr wrap="square" anchor="ctr" lIns="0" rIns="0" tIns="0" bIns="0">
             <a:spAutoFit/>
           </a:bodyPr>
           <a:lstStyle/>
@@ -15245,7 +15542,7 @@
         </p:nvSpPr>
         <p:spPr>
           <a:xfrm>
-            <a:off x="685800" y="2465397"/>
+            <a:off x="685800" y="1627632"/>
             <a:ext cx="457200" cy="437896"/>
           </a:xfrm>
           <a:prstGeom prst="rect">
@@ -15254,7 +15551,7 @@
           <a:noFill/>
         </p:spPr>
         <p:txBody>
-          <a:bodyPr wrap="square" anchor="t">
+          <a:bodyPr wrap="square" anchor="t" lIns="0" rIns="0" tIns="0" bIns="0">
             <a:spAutoFit/>
           </a:bodyPr>
           <a:lstStyle/>
@@ -15279,7 +15576,7 @@
         </p:nvSpPr>
         <p:spPr>
           <a:xfrm>
-            <a:off x="1143000" y="2465397"/>
+            <a:off x="1143000" y="1627632"/>
             <a:ext cx="10362895" cy="437896"/>
           </a:xfrm>
           <a:prstGeom prst="rect">
@@ -15288,7 +15585,7 @@
           <a:noFill/>
         </p:spPr>
         <p:txBody>
-          <a:bodyPr wrap="square" anchor="t">
+          <a:bodyPr wrap="square" anchor="t" lIns="0" rIns="0" tIns="0" bIns="0">
             <a:spAutoFit/>
           </a:bodyPr>
           <a:lstStyle/>
@@ -15313,7 +15610,7 @@
         </p:nvSpPr>
         <p:spPr>
           <a:xfrm>
-            <a:off x="685800" y="2958157"/>
+            <a:off x="685800" y="2120392"/>
             <a:ext cx="457200" cy="437896"/>
           </a:xfrm>
           <a:prstGeom prst="rect">
@@ -15322,7 +15619,7 @@
           <a:noFill/>
         </p:spPr>
         <p:txBody>
-          <a:bodyPr wrap="square" anchor="t">
+          <a:bodyPr wrap="square" anchor="t" lIns="0" rIns="0" tIns="0" bIns="0">
             <a:spAutoFit/>
           </a:bodyPr>
           <a:lstStyle/>
@@ -15347,7 +15644,7 @@
         </p:nvSpPr>
         <p:spPr>
           <a:xfrm>
-            <a:off x="1143000" y="2958157"/>
+            <a:off x="1143000" y="2120392"/>
             <a:ext cx="10362895" cy="437896"/>
           </a:xfrm>
           <a:prstGeom prst="rect">
@@ -15356,7 +15653,7 @@
           <a:noFill/>
         </p:spPr>
         <p:txBody>
-          <a:bodyPr wrap="square" anchor="t">
+          <a:bodyPr wrap="square" anchor="t" lIns="0" rIns="0" tIns="0" bIns="0">
             <a:spAutoFit/>
           </a:bodyPr>
           <a:lstStyle/>
@@ -15381,7 +15678,7 @@
         </p:nvSpPr>
         <p:spPr>
           <a:xfrm>
-            <a:off x="685800" y="3450917"/>
+            <a:off x="685800" y="2613152"/>
             <a:ext cx="457200" cy="437896"/>
           </a:xfrm>
           <a:prstGeom prst="rect">
@@ -15390,7 +15687,7 @@
           <a:noFill/>
         </p:spPr>
         <p:txBody>
-          <a:bodyPr wrap="square" anchor="t">
+          <a:bodyPr wrap="square" anchor="t" lIns="0" rIns="0" tIns="0" bIns="0">
             <a:spAutoFit/>
           </a:bodyPr>
           <a:lstStyle/>
@@ -15415,7 +15712,7 @@
         </p:nvSpPr>
         <p:spPr>
           <a:xfrm>
-            <a:off x="1143000" y="3450917"/>
+            <a:off x="1143000" y="2613152"/>
             <a:ext cx="10362895" cy="437896"/>
           </a:xfrm>
           <a:prstGeom prst="rect">
@@ -15424,7 +15721,7 @@
           <a:noFill/>
         </p:spPr>
         <p:txBody>
-          <a:bodyPr wrap="square" anchor="t">
+          <a:bodyPr wrap="square" anchor="t" lIns="0" rIns="0" tIns="0" bIns="0">
             <a:spAutoFit/>
           </a:bodyPr>
           <a:lstStyle/>
@@ -15449,7 +15746,7 @@
         </p:nvSpPr>
         <p:spPr>
           <a:xfrm>
-            <a:off x="685800" y="3943677"/>
+            <a:off x="685800" y="3105912"/>
             <a:ext cx="457200" cy="437896"/>
           </a:xfrm>
           <a:prstGeom prst="rect">
@@ -15458,7 +15755,7 @@
           <a:noFill/>
         </p:spPr>
         <p:txBody>
-          <a:bodyPr wrap="square" anchor="t">
+          <a:bodyPr wrap="square" anchor="t" lIns="0" rIns="0" tIns="0" bIns="0">
             <a:spAutoFit/>
           </a:bodyPr>
           <a:lstStyle/>
@@ -15483,7 +15780,7 @@
         </p:nvSpPr>
         <p:spPr>
           <a:xfrm>
-            <a:off x="1143000" y="3943677"/>
+            <a:off x="1143000" y="3105912"/>
             <a:ext cx="10362895" cy="437896"/>
           </a:xfrm>
           <a:prstGeom prst="rect">
@@ -15492,7 +15789,7 @@
           <a:noFill/>
         </p:spPr>
         <p:txBody>
-          <a:bodyPr wrap="square" anchor="t">
+          <a:bodyPr wrap="square" anchor="t" lIns="0" rIns="0" tIns="0" bIns="0">
             <a:spAutoFit/>
           </a:bodyPr>
           <a:lstStyle/>
@@ -15511,7 +15808,7 @@
       </p:sp>
       <p:pic>
         <p:nvPicPr>
-          <p:cNvPr id="14" name="Picture 13" descr="89b2674ecb7d9d10.png"/>
+          <p:cNvPr id="14" name="Picture 13" descr="b4d12f2002153df1.png"/>
           <p:cNvPicPr>
             <a:picLocks noChangeAspect="1"/>
           </p:cNvPicPr>
@@ -15594,7 +15891,7 @@
           <a:noFill/>
         </p:spPr>
         <p:txBody>
-          <a:bodyPr wrap="square" anchor="t">
+          <a:bodyPr wrap="square" anchor="t" lIns="0" rIns="0" tIns="0" bIns="0">
             <a:spAutoFit/>
           </a:bodyPr>
           <a:lstStyle/>
@@ -15628,7 +15925,7 @@
           <a:noFill/>
         </p:spPr>
         <p:txBody>
-          <a:bodyPr wrap="square" anchor="t">
+          <a:bodyPr wrap="square" anchor="t" lIns="0" rIns="0" tIns="0" bIns="0">
             <a:spAutoFit/>
           </a:bodyPr>
           <a:lstStyle/>
@@ -15778,7 +16075,7 @@
           <a:noFill/>
         </p:spPr>
         <p:txBody>
-          <a:bodyPr wrap="square" anchor="ctr">
+          <a:bodyPr wrap="square" anchor="ctr" lIns="0" rIns="0" tIns="0" bIns="0">
             <a:spAutoFit/>
           </a:bodyPr>
           <a:lstStyle/>
@@ -15847,7 +16144,7 @@
         </p:nvSpPr>
         <p:spPr>
           <a:xfrm>
-            <a:off x="685800" y="2764028"/>
+            <a:off x="685800" y="2591308"/>
             <a:ext cx="457200" cy="437896"/>
           </a:xfrm>
           <a:prstGeom prst="rect">
@@ -15856,7 +16153,7 @@
           <a:noFill/>
         </p:spPr>
         <p:txBody>
-          <a:bodyPr wrap="square" anchor="t">
+          <a:bodyPr wrap="square" anchor="t" lIns="0" rIns="0" tIns="0" bIns="0">
             <a:spAutoFit/>
           </a:bodyPr>
           <a:lstStyle/>
@@ -15881,7 +16178,7 @@
         </p:nvSpPr>
         <p:spPr>
           <a:xfrm>
-            <a:off x="1143000" y="2764028"/>
+            <a:off x="1143000" y="2591308"/>
             <a:ext cx="10362895" cy="437896"/>
           </a:xfrm>
           <a:prstGeom prst="rect">
@@ -15890,7 +16187,7 @@
           <a:noFill/>
         </p:spPr>
         <p:txBody>
-          <a:bodyPr wrap="square" anchor="t">
+          <a:bodyPr wrap="square" anchor="t" lIns="0" rIns="0" tIns="0" bIns="0">
             <a:spAutoFit/>
           </a:bodyPr>
           <a:lstStyle/>
@@ -15915,7 +16212,7 @@
         </p:nvSpPr>
         <p:spPr>
           <a:xfrm>
-            <a:off x="685800" y="3256788"/>
+            <a:off x="685800" y="3084068"/>
             <a:ext cx="457200" cy="437896"/>
           </a:xfrm>
           <a:prstGeom prst="rect">
@@ -15924,7 +16221,7 @@
           <a:noFill/>
         </p:spPr>
         <p:txBody>
-          <a:bodyPr wrap="square" anchor="t">
+          <a:bodyPr wrap="square" anchor="t" lIns="0" rIns="0" tIns="0" bIns="0">
             <a:spAutoFit/>
           </a:bodyPr>
           <a:lstStyle/>
@@ -15949,7 +16246,7 @@
         </p:nvSpPr>
         <p:spPr>
           <a:xfrm>
-            <a:off x="1143000" y="3256788"/>
+            <a:off x="1143000" y="3084068"/>
             <a:ext cx="10362895" cy="437896"/>
           </a:xfrm>
           <a:prstGeom prst="rect">
@@ -15958,7 +16255,7 @@
           <a:noFill/>
         </p:spPr>
         <p:txBody>
-          <a:bodyPr wrap="square" anchor="t">
+          <a:bodyPr wrap="square" anchor="t" lIns="0" rIns="0" tIns="0" bIns="0">
             <a:spAutoFit/>
           </a:bodyPr>
           <a:lstStyle/>
@@ -15983,7 +16280,7 @@
         </p:nvSpPr>
         <p:spPr>
           <a:xfrm>
-            <a:off x="685800" y="3749548"/>
+            <a:off x="685800" y="3576828"/>
             <a:ext cx="457200" cy="437896"/>
           </a:xfrm>
           <a:prstGeom prst="rect">
@@ -15992,7 +16289,7 @@
           <a:noFill/>
         </p:spPr>
         <p:txBody>
-          <a:bodyPr wrap="square" anchor="t">
+          <a:bodyPr wrap="square" anchor="t" lIns="0" rIns="0" tIns="0" bIns="0">
             <a:spAutoFit/>
           </a:bodyPr>
           <a:lstStyle/>
@@ -16017,7 +16314,7 @@
         </p:nvSpPr>
         <p:spPr>
           <a:xfrm>
-            <a:off x="1143000" y="3749548"/>
+            <a:off x="1143000" y="3576828"/>
             <a:ext cx="10362895" cy="437896"/>
           </a:xfrm>
           <a:prstGeom prst="rect">
@@ -16026,7 +16323,7 @@
           <a:noFill/>
         </p:spPr>
         <p:txBody>
-          <a:bodyPr wrap="square" anchor="t">
+          <a:bodyPr wrap="square" anchor="t" lIns="0" rIns="0" tIns="0" bIns="0">
             <a:spAutoFit/>
           </a:bodyPr>
           <a:lstStyle/>
@@ -16051,8 +16348,8 @@
         </p:nvSpPr>
         <p:spPr>
           <a:xfrm>
-            <a:off x="685800" y="4352036"/>
-            <a:ext cx="10820095" cy="564896"/>
+            <a:off x="685800" y="4179316"/>
+            <a:ext cx="10820095" cy="910336"/>
           </a:xfrm>
           <a:prstGeom prst="rect">
             <a:avLst/>
@@ -16060,7 +16357,7 @@
           <a:noFill/>
         </p:spPr>
         <p:txBody>
-          <a:bodyPr wrap="square" anchor="t">
+          <a:bodyPr wrap="square" anchor="t" lIns="0" rIns="0" tIns="0" bIns="0">
             <a:spAutoFit/>
           </a:bodyPr>
           <a:lstStyle/>
@@ -16143,7 +16440,7 @@
           <a:noFill/>
         </p:spPr>
         <p:txBody>
-          <a:bodyPr wrap="square" anchor="t">
+          <a:bodyPr wrap="square" anchor="t" lIns="0" rIns="0" tIns="0" bIns="0">
             <a:spAutoFit/>
           </a:bodyPr>
           <a:lstStyle/>
@@ -16177,7 +16474,7 @@
           <a:noFill/>
         </p:spPr>
         <p:txBody>
-          <a:bodyPr wrap="square" anchor="t">
+          <a:bodyPr wrap="square" anchor="t" lIns="0" rIns="0" tIns="0" bIns="0">
             <a:spAutoFit/>
           </a:bodyPr>
           <a:lstStyle/>
@@ -16327,7 +16624,7 @@
           <a:noFill/>
         </p:spPr>
         <p:txBody>
-          <a:bodyPr wrap="square" anchor="ctr">
+          <a:bodyPr wrap="square" anchor="ctr" lIns="0" rIns="0" tIns="0" bIns="0">
             <a:spAutoFit/>
           </a:bodyPr>
           <a:lstStyle/>
@@ -16405,7 +16702,7 @@
           <a:noFill/>
         </p:spPr>
         <p:txBody>
-          <a:bodyPr wrap="square" anchor="t">
+          <a:bodyPr wrap="square" anchor="t" lIns="0" rIns="0" tIns="0" bIns="0">
             <a:spAutoFit/>
           </a:bodyPr>
           <a:lstStyle/>
@@ -16504,7 +16801,7 @@
           <a:noFill/>
         </p:spPr>
         <p:txBody>
-          <a:bodyPr wrap="square" anchor="t">
+          <a:bodyPr wrap="square" anchor="t" lIns="0" rIns="0" tIns="0" bIns="0">
             <a:spAutoFit/>
           </a:bodyPr>
           <a:lstStyle/>
@@ -16538,7 +16835,7 @@
           <a:noFill/>
         </p:spPr>
         <p:txBody>
-          <a:bodyPr wrap="square" anchor="t">
+          <a:bodyPr wrap="square" anchor="t" lIns="0" rIns="0" tIns="0" bIns="0">
             <a:spAutoFit/>
           </a:bodyPr>
           <a:lstStyle/>
@@ -16688,7 +16985,7 @@
           <a:noFill/>
         </p:spPr>
         <p:txBody>
-          <a:bodyPr wrap="square" anchor="ctr">
+          <a:bodyPr wrap="square" anchor="ctr" lIns="0" rIns="0" tIns="0" bIns="0">
             <a:spAutoFit/>
           </a:bodyPr>
           <a:lstStyle/>
@@ -16766,7 +17063,7 @@
           <a:noFill/>
         </p:spPr>
         <p:txBody>
-          <a:bodyPr wrap="square" anchor="t">
+          <a:bodyPr wrap="square" anchor="t" lIns="0" rIns="0" tIns="0" bIns="0">
             <a:spAutoFit/>
           </a:bodyPr>
           <a:lstStyle/>
@@ -16849,7 +17146,7 @@
           <a:noFill/>
         </p:spPr>
         <p:txBody>
-          <a:bodyPr wrap="square" anchor="t">
+          <a:bodyPr wrap="square" anchor="t" lIns="0" rIns="0" tIns="0" bIns="0">
             <a:spAutoFit/>
           </a:bodyPr>
           <a:lstStyle/>
@@ -16883,7 +17180,7 @@
           <a:noFill/>
         </p:spPr>
         <p:txBody>
-          <a:bodyPr wrap="square" anchor="t">
+          <a:bodyPr wrap="square" anchor="t" lIns="0" rIns="0" tIns="0" bIns="0">
             <a:spAutoFit/>
           </a:bodyPr>
           <a:lstStyle/>
@@ -17033,7 +17330,7 @@
           <a:noFill/>
         </p:spPr>
         <p:txBody>
-          <a:bodyPr wrap="square" anchor="ctr">
+          <a:bodyPr wrap="square" anchor="ctr" lIns="0" rIns="0" tIns="0" bIns="0">
             <a:spAutoFit/>
           </a:bodyPr>
           <a:lstStyle/>
@@ -17111,7 +17408,7 @@
           <a:noFill/>
         </p:spPr>
         <p:txBody>
-          <a:bodyPr wrap="square" anchor="t">
+          <a:bodyPr wrap="square" anchor="t" lIns="0" rIns="0" tIns="0" bIns="0">
             <a:spAutoFit/>
           </a:bodyPr>
           <a:lstStyle/>
@@ -17194,7 +17491,7 @@
           <a:noFill/>
         </p:spPr>
         <p:txBody>
-          <a:bodyPr wrap="square" anchor="t">
+          <a:bodyPr wrap="square" anchor="t" lIns="0" rIns="0" tIns="0" bIns="0">
             <a:spAutoFit/>
           </a:bodyPr>
           <a:lstStyle/>
@@ -17228,7 +17525,7 @@
           <a:noFill/>
         </p:spPr>
         <p:txBody>
-          <a:bodyPr wrap="square" anchor="t">
+          <a:bodyPr wrap="square" anchor="t" lIns="0" rIns="0" tIns="0" bIns="0">
             <a:spAutoFit/>
           </a:bodyPr>
           <a:lstStyle/>
@@ -17325,7 +17622,7 @@
           <a:noFill/>
         </p:spPr>
         <p:txBody>
-          <a:bodyPr wrap="square" anchor="ctr">
+          <a:bodyPr wrap="square" anchor="ctr" lIns="0" rIns="0" tIns="0" bIns="0">
             <a:spAutoFit/>
           </a:bodyPr>
           <a:lstStyle/>
@@ -17669,7 +17966,7 @@
           <a:noFill/>
         </p:spPr>
         <p:txBody>
-          <a:bodyPr wrap="square" anchor="t">
+          <a:bodyPr wrap="square" anchor="t" lIns="0" rIns="0" tIns="0" bIns="0">
             <a:spAutoFit/>
           </a:bodyPr>
           <a:lstStyle/>
@@ -17703,7 +18000,7 @@
           <a:noFill/>
         </p:spPr>
         <p:txBody>
-          <a:bodyPr wrap="square" anchor="t">
+          <a:bodyPr wrap="square" anchor="t" lIns="0" rIns="0" tIns="0" bIns="0">
             <a:spAutoFit/>
           </a:bodyPr>
           <a:lstStyle/>
@@ -17853,7 +18150,7 @@
           <a:noFill/>
         </p:spPr>
         <p:txBody>
-          <a:bodyPr wrap="square" anchor="ctr">
+          <a:bodyPr wrap="square" anchor="ctr" lIns="0" rIns="0" tIns="0" bIns="0">
             <a:spAutoFit/>
           </a:bodyPr>
           <a:lstStyle/>
@@ -17922,8 +18219,8 @@
         </p:nvSpPr>
         <p:spPr>
           <a:xfrm>
-            <a:off x="685800" y="2985008"/>
-            <a:ext cx="10820095" cy="1710944"/>
+            <a:off x="685800" y="2812288"/>
+            <a:ext cx="10820095" cy="2056384"/>
           </a:xfrm>
           <a:prstGeom prst="rect">
             <a:avLst/>
@@ -17931,7 +18228,7 @@
           <a:noFill/>
         </p:spPr>
         <p:txBody>
-          <a:bodyPr wrap="square" anchor="t">
+          <a:bodyPr wrap="square" anchor="t" lIns="0" rIns="0" tIns="0" bIns="0">
             <a:spAutoFit/>
           </a:bodyPr>
           <a:lstStyle/>
@@ -18030,7 +18327,7 @@
           <a:noFill/>
         </p:spPr>
         <p:txBody>
-          <a:bodyPr wrap="square" anchor="t">
+          <a:bodyPr wrap="square" anchor="t" lIns="0" rIns="0" tIns="0" bIns="0">
             <a:spAutoFit/>
           </a:bodyPr>
           <a:lstStyle/>
@@ -18064,7 +18361,7 @@
           <a:noFill/>
         </p:spPr>
         <p:txBody>
-          <a:bodyPr wrap="square" anchor="t">
+          <a:bodyPr wrap="square" anchor="t" lIns="0" rIns="0" tIns="0" bIns="0">
             <a:spAutoFit/>
           </a:bodyPr>
           <a:lstStyle/>
@@ -18214,7 +18511,7 @@
           <a:noFill/>
         </p:spPr>
         <p:txBody>
-          <a:bodyPr wrap="square" anchor="ctr">
+          <a:bodyPr wrap="square" anchor="ctr" lIns="0" rIns="0" tIns="0" bIns="0">
             <a:spAutoFit/>
           </a:bodyPr>
           <a:lstStyle/>
@@ -18284,7 +18581,7 @@
         <p:spPr>
           <a:xfrm>
             <a:off x="685800" y="1627632"/>
-            <a:ext cx="10820095" cy="1883664"/>
+            <a:ext cx="10820095" cy="1554480"/>
           </a:xfrm>
           <a:prstGeom prst="rect">
             <a:avLst/>
@@ -18328,7 +18625,7 @@
         <p:spPr>
           <a:xfrm>
             <a:off x="685800" y="1627632"/>
-            <a:ext cx="50292" cy="1883664"/>
+            <a:ext cx="50292" cy="1554480"/>
           </a:xfrm>
           <a:prstGeom prst="rect">
             <a:avLst/>
@@ -18372,7 +18669,7 @@
         <p:spPr>
           <a:xfrm>
             <a:off x="923544" y="1728216"/>
-            <a:ext cx="10417759" cy="1700784"/>
+            <a:ext cx="10417759" cy="1371600"/>
           </a:xfrm>
           <a:prstGeom prst="rect">
             <a:avLst/>
@@ -18380,7 +18677,7 @@
           <a:noFill/>
         </p:spPr>
         <p:txBody>
-          <a:bodyPr wrap="square" anchor="t">
+          <a:bodyPr wrap="square" anchor="t" lIns="0" rIns="0" tIns="0" bIns="0">
             <a:spAutoFit/>
           </a:bodyPr>
           <a:lstStyle/>
@@ -18391,7 +18688,7 @@
               </a:spcAft>
             </a:pPr>
             <a:r>
-              <a:rPr sz="1600" b="0">
+              <a:rPr sz="1200" b="0">
                 <a:solidFill>
                   <a:srgbClr val="E4ECF7"/>
                 </a:solidFill>
@@ -18407,7 +18704,7 @@
               </a:spcAft>
             </a:pPr>
             <a:r>
-              <a:rPr sz="1600" b="0">
+              <a:rPr sz="1200" b="0">
                 <a:solidFill>
                   <a:srgbClr val="E4ECF7"/>
                 </a:solidFill>
@@ -18423,7 +18720,7 @@
               </a:spcAft>
             </a:pPr>
             <a:r>
-              <a:rPr sz="1600" b="0">
+              <a:rPr sz="1200" b="0">
                 <a:solidFill>
                   <a:srgbClr val="E4ECF7"/>
                 </a:solidFill>
@@ -18439,7 +18736,7 @@
               </a:spcAft>
             </a:pPr>
             <a:r>
-              <a:rPr sz="1600" b="0">
+              <a:rPr sz="1200" b="0">
                 <a:solidFill>
                   <a:srgbClr val="E4ECF7"/>
                 </a:solidFill>
@@ -18455,7 +18752,7 @@
               </a:spcAft>
             </a:pPr>
             <a:r>
-              <a:rPr sz="1600" b="0">
+              <a:rPr sz="1200" b="0">
                 <a:solidFill>
                   <a:srgbClr val="E4ECF7"/>
                 </a:solidFill>
@@ -18471,7 +18768,7 @@
               </a:spcAft>
             </a:pPr>
             <a:r>
-              <a:rPr sz="1600" b="0">
+              <a:rPr sz="1200" b="0">
                 <a:solidFill>
                   <a:srgbClr val="E4ECF7"/>
                 </a:solidFill>
@@ -18490,8 +18787,8 @@
         </p:nvSpPr>
         <p:spPr>
           <a:xfrm>
-            <a:off x="685800" y="3675887"/>
-            <a:ext cx="10820095" cy="564896"/>
+            <a:off x="685800" y="3346704"/>
+            <a:ext cx="10820095" cy="478536"/>
           </a:xfrm>
           <a:prstGeom prst="rect">
             <a:avLst/>
@@ -18499,18 +18796,18 @@
           <a:noFill/>
         </p:spPr>
         <p:txBody>
-          <a:bodyPr wrap="square" anchor="t">
+          <a:bodyPr wrap="square" anchor="t" lIns="0" rIns="0" tIns="0" bIns="0">
             <a:spAutoFit/>
           </a:bodyPr>
           <a:lstStyle/>
           <a:p>
             <a:pPr>
               <a:spcAft>
-                <a:spcPts val="900"/>
+                <a:spcPts val="700"/>
               </a:spcAft>
             </a:pPr>
             <a:r>
-              <a:rPr sz="2000" b="0">
+              <a:rPr sz="1500" b="0">
                 <a:solidFill>
                   <a:srgbClr val="1C1C1A"/>
                 </a:solidFill>
@@ -18523,7 +18820,7 @@
       </p:sp>
       <p:pic>
         <p:nvPicPr>
-          <p:cNvPr id="10" name="Picture 9" descr="d3dfd1a3313aad48.png"/>
+          <p:cNvPr id="10" name="Picture 9" descr="39a34bff8ec3dea9.png"/>
           <p:cNvPicPr>
             <a:picLocks noChangeAspect="1"/>
           </p:cNvPicPr>
@@ -18537,8 +18834,8 @@
         </p:blipFill>
         <p:spPr>
           <a:xfrm>
-            <a:off x="1522263" y="4368799"/>
-            <a:ext cx="9147168" cy="1684528"/>
+            <a:off x="882292" y="4133087"/>
+            <a:ext cx="10427109" cy="1920240"/>
           </a:xfrm>
           <a:prstGeom prst="rect">
             <a:avLst/>
@@ -18606,7 +18903,7 @@
           <a:noFill/>
         </p:spPr>
         <p:txBody>
-          <a:bodyPr wrap="square" anchor="t">
+          <a:bodyPr wrap="square" anchor="t" lIns="0" rIns="0" tIns="0" bIns="0">
             <a:spAutoFit/>
           </a:bodyPr>
           <a:lstStyle/>
@@ -18640,7 +18937,7 @@
           <a:noFill/>
         </p:spPr>
         <p:txBody>
-          <a:bodyPr wrap="square" anchor="t">
+          <a:bodyPr wrap="square" anchor="t" lIns="0" rIns="0" tIns="0" bIns="0">
             <a:spAutoFit/>
           </a:bodyPr>
           <a:lstStyle/>
@@ -18790,7 +19087,7 @@
           <a:noFill/>
         </p:spPr>
         <p:txBody>
-          <a:bodyPr wrap="square" anchor="ctr">
+          <a:bodyPr wrap="square" anchor="ctr" lIns="0" rIns="0" tIns="0" bIns="0">
             <a:spAutoFit/>
           </a:bodyPr>
           <a:lstStyle/>
@@ -18853,7 +19150,7 @@
       </p:sp>
       <p:pic>
         <p:nvPicPr>
-          <p:cNvPr id="6" name="Picture 5" descr="e19648cbc1ce0117.png"/>
+          <p:cNvPr id="6" name="Picture 5" descr="dea4710cc4c1eeb0.png"/>
           <p:cNvPicPr>
             <a:picLocks noChangeAspect="1"/>
           </p:cNvPicPr>
@@ -18883,8 +19180,8 @@
         </p:nvSpPr>
         <p:spPr>
           <a:xfrm>
-            <a:off x="5771244" y="2324608"/>
-            <a:ext cx="5734650" cy="810768"/>
+            <a:off x="5771244" y="2140712"/>
+            <a:ext cx="5734650" cy="833120"/>
           </a:xfrm>
           <a:prstGeom prst="rect">
             <a:avLst/>
@@ -18927,8 +19224,8 @@
         </p:nvSpPr>
         <p:spPr>
           <a:xfrm>
-            <a:off x="5771244" y="2324608"/>
-            <a:ext cx="50292" cy="810768"/>
+            <a:off x="5771244" y="2140712"/>
+            <a:ext cx="50292" cy="833120"/>
           </a:xfrm>
           <a:prstGeom prst="rect">
             <a:avLst/>
@@ -18971,8 +19268,8 @@
         </p:nvSpPr>
         <p:spPr>
           <a:xfrm>
-            <a:off x="6008988" y="2425192"/>
-            <a:ext cx="5332314" cy="627888"/>
+            <a:off x="6008988" y="2241296"/>
+            <a:ext cx="5332314" cy="650239"/>
           </a:xfrm>
           <a:prstGeom prst="rect">
             <a:avLst/>
@@ -18980,7 +19277,7 @@
           <a:noFill/>
         </p:spPr>
         <p:txBody>
-          <a:bodyPr wrap="square" anchor="t">
+          <a:bodyPr wrap="square" anchor="t" lIns="0" rIns="0" tIns="0" bIns="0">
             <a:spAutoFit/>
           </a:bodyPr>
           <a:lstStyle/>
@@ -19010,8 +19307,8 @@
         </p:nvSpPr>
         <p:spPr>
           <a:xfrm>
-            <a:off x="5771244" y="3299968"/>
-            <a:ext cx="5734650" cy="2056384"/>
+            <a:off x="5771244" y="3138424"/>
+            <a:ext cx="5734650" cy="2401824"/>
           </a:xfrm>
           <a:prstGeom prst="rect">
             <a:avLst/>
@@ -19019,7 +19316,7 @@
           <a:noFill/>
         </p:spPr>
         <p:txBody>
-          <a:bodyPr wrap="square" anchor="t">
+          <a:bodyPr wrap="square" anchor="t" lIns="0" rIns="0" tIns="0" bIns="0">
             <a:spAutoFit/>
           </a:bodyPr>
           <a:lstStyle/>
@@ -19118,7 +19415,7 @@
           <a:noFill/>
         </p:spPr>
         <p:txBody>
-          <a:bodyPr wrap="square" anchor="t">
+          <a:bodyPr wrap="square" anchor="t" lIns="0" rIns="0" tIns="0" bIns="0">
             <a:spAutoFit/>
           </a:bodyPr>
           <a:lstStyle/>
@@ -19152,7 +19449,7 @@
           <a:noFill/>
         </p:spPr>
         <p:txBody>
-          <a:bodyPr wrap="square" anchor="t">
+          <a:bodyPr wrap="square" anchor="t" lIns="0" rIns="0" tIns="0" bIns="0">
             <a:spAutoFit/>
           </a:bodyPr>
           <a:lstStyle/>
@@ -19302,7 +19599,7 @@
           <a:noFill/>
         </p:spPr>
         <p:txBody>
-          <a:bodyPr wrap="square" anchor="ctr">
+          <a:bodyPr wrap="square" anchor="ctr" lIns="0" rIns="0" tIns="0" bIns="0">
             <a:spAutoFit/>
           </a:bodyPr>
           <a:lstStyle/>
@@ -19371,8 +19668,8 @@
         </p:nvSpPr>
         <p:spPr>
           <a:xfrm>
-            <a:off x="685800" y="2497328"/>
-            <a:ext cx="10820095" cy="810768"/>
+            <a:off x="685800" y="2486152"/>
+            <a:ext cx="10820095" cy="833120"/>
           </a:xfrm>
           <a:prstGeom prst="rect">
             <a:avLst/>
@@ -19415,8 +19712,8 @@
         </p:nvSpPr>
         <p:spPr>
           <a:xfrm>
-            <a:off x="685800" y="2497328"/>
-            <a:ext cx="50292" cy="810768"/>
+            <a:off x="685800" y="2486152"/>
+            <a:ext cx="50292" cy="833120"/>
           </a:xfrm>
           <a:prstGeom prst="rect">
             <a:avLst/>
@@ -19459,8 +19756,8 @@
         </p:nvSpPr>
         <p:spPr>
           <a:xfrm>
-            <a:off x="923544" y="2597912"/>
-            <a:ext cx="10417759" cy="627888"/>
+            <a:off x="923544" y="2586736"/>
+            <a:ext cx="10417759" cy="650239"/>
           </a:xfrm>
           <a:prstGeom prst="rect">
             <a:avLst/>
@@ -19468,7 +19765,7 @@
           <a:noFill/>
         </p:spPr>
         <p:txBody>
-          <a:bodyPr wrap="square" anchor="t">
+          <a:bodyPr wrap="square" anchor="t" lIns="0" rIns="0" tIns="0" bIns="0">
             <a:spAutoFit/>
           </a:bodyPr>
           <a:lstStyle/>
@@ -19514,7 +19811,7 @@
         </p:nvSpPr>
         <p:spPr>
           <a:xfrm>
-            <a:off x="685800" y="3472688"/>
+            <a:off x="685800" y="3483864"/>
             <a:ext cx="10820095" cy="1710944"/>
           </a:xfrm>
           <a:prstGeom prst="rect">
@@ -19523,7 +19820,7 @@
           <a:noFill/>
         </p:spPr>
         <p:txBody>
-          <a:bodyPr wrap="square" anchor="t">
+          <a:bodyPr wrap="square" anchor="t" lIns="0" rIns="0" tIns="0" bIns="0">
             <a:spAutoFit/>
           </a:bodyPr>
           <a:lstStyle/>
@@ -19622,7 +19919,7 @@
           <a:noFill/>
         </p:spPr>
         <p:txBody>
-          <a:bodyPr wrap="square" anchor="t">
+          <a:bodyPr wrap="square" anchor="t" lIns="0" rIns="0" tIns="0" bIns="0">
             <a:spAutoFit/>
           </a:bodyPr>
           <a:lstStyle/>
@@ -19656,7 +19953,7 @@
           <a:noFill/>
         </p:spPr>
         <p:txBody>
-          <a:bodyPr wrap="square" anchor="t">
+          <a:bodyPr wrap="square" anchor="t" lIns="0" rIns="0" tIns="0" bIns="0">
             <a:spAutoFit/>
           </a:bodyPr>
           <a:lstStyle/>
@@ -19806,7 +20103,7 @@
           <a:noFill/>
         </p:spPr>
         <p:txBody>
-          <a:bodyPr wrap="square" anchor="ctr">
+          <a:bodyPr wrap="square" anchor="ctr" lIns="0" rIns="0" tIns="0" bIns="0">
             <a:spAutoFit/>
           </a:bodyPr>
           <a:lstStyle/>
@@ -19876,7 +20173,7 @@
         <p:spPr>
           <a:xfrm>
             <a:off x="685800" y="1627632"/>
-            <a:ext cx="10820095" cy="2420112"/>
+            <a:ext cx="10820095" cy="2275840"/>
           </a:xfrm>
           <a:prstGeom prst="rect">
             <a:avLst/>
@@ -19920,7 +20217,7 @@
         <p:spPr>
           <a:xfrm>
             <a:off x="685800" y="1627632"/>
-            <a:ext cx="50292" cy="2420112"/>
+            <a:ext cx="50292" cy="2275840"/>
           </a:xfrm>
           <a:prstGeom prst="rect">
             <a:avLst/>
@@ -19964,7 +20261,7 @@
         <p:spPr>
           <a:xfrm>
             <a:off x="923544" y="1728216"/>
-            <a:ext cx="10417759" cy="2237231"/>
+            <a:ext cx="10417759" cy="2092959"/>
           </a:xfrm>
           <a:prstGeom prst="rect">
             <a:avLst/>
@@ -19972,7 +20269,7 @@
           <a:noFill/>
         </p:spPr>
         <p:txBody>
-          <a:bodyPr wrap="square" anchor="t">
+          <a:bodyPr wrap="square" anchor="t" lIns="0" rIns="0" tIns="0" bIns="0">
             <a:spAutoFit/>
           </a:bodyPr>
           <a:lstStyle/>
@@ -19983,7 +20280,7 @@
               </a:spcAft>
             </a:pPr>
             <a:r>
-              <a:rPr sz="1600" b="0">
+              <a:rPr sz="1400" b="0">
                 <a:solidFill>
                   <a:srgbClr val="E4ECF7"/>
                 </a:solidFill>
@@ -19999,7 +20296,7 @@
               </a:spcAft>
             </a:pPr>
             <a:r>
-              <a:rPr sz="1600" b="0">
+              <a:rPr sz="1400" b="0">
                 <a:solidFill>
                   <a:srgbClr val="E4ECF7"/>
                 </a:solidFill>
@@ -20015,7 +20312,7 @@
               </a:spcAft>
             </a:pPr>
             <a:r>
-              <a:rPr sz="1600" b="0">
+              <a:rPr sz="1400" b="0">
                 <a:solidFill>
                   <a:srgbClr val="E4ECF7"/>
                 </a:solidFill>
@@ -20031,7 +20328,7 @@
               </a:spcAft>
             </a:pPr>
             <a:r>
-              <a:rPr sz="1600" b="0">
+              <a:rPr sz="1400" b="0">
                 <a:solidFill>
                   <a:srgbClr val="E4ECF7"/>
                 </a:solidFill>
@@ -20047,7 +20344,7 @@
               </a:spcAft>
             </a:pPr>
             <a:r>
-              <a:rPr sz="1600" b="0">
+              <a:rPr sz="1400" b="0">
                 <a:solidFill>
                   <a:srgbClr val="E4ECF7"/>
                 </a:solidFill>
@@ -20063,7 +20360,7 @@
               </a:spcAft>
             </a:pPr>
             <a:r>
-              <a:rPr sz="1600" b="0">
+              <a:rPr sz="1400" b="0">
                 <a:solidFill>
                   <a:srgbClr val="E4ECF7"/>
                 </a:solidFill>
@@ -20086,7 +20383,7 @@
               </a:spcAft>
             </a:pPr>
             <a:r>
-              <a:rPr sz="1600" b="0">
+              <a:rPr sz="1400" b="0">
                 <a:solidFill>
                   <a:srgbClr val="E4ECF7"/>
                 </a:solidFill>
@@ -20105,8 +20402,8 @@
         </p:nvSpPr>
         <p:spPr>
           <a:xfrm>
-            <a:off x="685800" y="4212336"/>
-            <a:ext cx="10820095" cy="542543"/>
+            <a:off x="685800" y="4068064"/>
+            <a:ext cx="10820095" cy="508508"/>
           </a:xfrm>
           <a:prstGeom prst="rect">
             <a:avLst/>
@@ -20149,8 +20446,8 @@
         </p:nvSpPr>
         <p:spPr>
           <a:xfrm>
-            <a:off x="685800" y="4212336"/>
-            <a:ext cx="50292" cy="542543"/>
+            <a:off x="685800" y="4068064"/>
+            <a:ext cx="50292" cy="508508"/>
           </a:xfrm>
           <a:prstGeom prst="rect">
             <a:avLst/>
@@ -20193,8 +20490,8 @@
         </p:nvSpPr>
         <p:spPr>
           <a:xfrm>
-            <a:off x="923544" y="4312920"/>
-            <a:ext cx="10417759" cy="359663"/>
+            <a:off x="923544" y="4168648"/>
+            <a:ext cx="10417759" cy="325628"/>
           </a:xfrm>
           <a:prstGeom prst="rect">
             <a:avLst/>
@@ -20202,7 +20499,7 @@
           <a:noFill/>
         </p:spPr>
         <p:txBody>
-          <a:bodyPr wrap="square" anchor="t">
+          <a:bodyPr wrap="square" anchor="t" lIns="0" rIns="0" tIns="0" bIns="0">
             <a:spAutoFit/>
           </a:bodyPr>
           <a:lstStyle/>
@@ -20213,7 +20510,7 @@
               </a:spcAft>
             </a:pPr>
             <a:r>
-              <a:rPr sz="1600" b="0">
+              <a:rPr sz="1400" b="0">
                 <a:solidFill>
                   <a:srgbClr val="E4ECF7"/>
                 </a:solidFill>
@@ -20232,8 +20529,8 @@
         </p:nvSpPr>
         <p:spPr>
           <a:xfrm>
-            <a:off x="685800" y="4919471"/>
-            <a:ext cx="10820095" cy="910336"/>
+            <a:off x="685800" y="4741164"/>
+            <a:ext cx="10820095" cy="806704"/>
           </a:xfrm>
           <a:prstGeom prst="rect">
             <a:avLst/>
@@ -20241,18 +20538,18 @@
           <a:noFill/>
         </p:spPr>
         <p:txBody>
-          <a:bodyPr wrap="square" anchor="t">
+          <a:bodyPr wrap="square" anchor="t" lIns="0" rIns="0" tIns="0" bIns="0">
             <a:spAutoFit/>
           </a:bodyPr>
           <a:lstStyle/>
           <a:p>
             <a:pPr>
               <a:spcAft>
-                <a:spcPts val="900"/>
+                <a:spcPts val="800"/>
               </a:spcAft>
             </a:pPr>
             <a:r>
-              <a:rPr sz="2000" b="0">
+              <a:rPr sz="1700" b="0">
                 <a:solidFill>
                   <a:srgbClr val="1C1C1A"/>
                 </a:solidFill>
@@ -20324,7 +20621,7 @@
           <a:noFill/>
         </p:spPr>
         <p:txBody>
-          <a:bodyPr wrap="square" anchor="t">
+          <a:bodyPr wrap="square" anchor="t" lIns="0" rIns="0" tIns="0" bIns="0">
             <a:spAutoFit/>
           </a:bodyPr>
           <a:lstStyle/>
@@ -20358,7 +20655,7 @@
           <a:noFill/>
         </p:spPr>
         <p:txBody>
-          <a:bodyPr wrap="square" anchor="t">
+          <a:bodyPr wrap="square" anchor="t" lIns="0" rIns="0" tIns="0" bIns="0">
             <a:spAutoFit/>
           </a:bodyPr>
           <a:lstStyle/>
